--- a/Elevate_HR_Team_12_Autonomous_MAS_Presentation.pptx
+++ b/Elevate_HR_Team_12_Autonomous_MAS_Presentation.pptx
@@ -16,6 +16,8 @@
     <p:sldId id="264" r:id="rId15"/>
     <p:sldId id="265" r:id="rId16"/>
     <p:sldId id="266" r:id="rId17"/>
+    <p:sldId id="267" r:id="rId18"/>
+    <p:sldId id="268" r:id="rId19"/>
   </p:sldIdLst>
   <p:sldSz cx="12191695" cy="6858000" type="screen4x3"/>
   <p:notesSz cx="6858000" cy="9144000"/>
@@ -3094,7 +3096,7 @@
     <p:bg>
       <p:bgPr>
         <a:solidFill>
-          <a:srgbClr val="0F172A"/>
+          <a:srgbClr val="F8FAFC"/>
         </a:solidFill>
         <a:effectLst/>
       </p:bgPr>
@@ -3108,23 +3110,75 @@
       <p:grpSpPr/>
       <p:sp>
         <p:nvSpPr>
-          <p:cNvPr id="2" name="Rectangle 1"/>
-          <p:cNvSpPr/>
+          <p:cNvPr id="2" name="TextBox 1"/>
+          <p:cNvSpPr txBox="1"/>
           <p:nvPr/>
         </p:nvSpPr>
         <p:spPr>
           <a:xfrm>
-            <a:off x="731520" y="1371600"/>
-            <a:ext cx="137160" cy="4114800"/>
+            <a:off x="731520" y="365760"/>
+            <a:ext cx="10698480" cy="1005840"/>
           </a:xfrm>
           <a:prstGeom prst="rect">
             <a:avLst/>
           </a:prstGeom>
+          <a:noFill/>
+        </p:spPr>
+        <p:txBody>
+          <a:bodyPr wrap="square" lIns="0" tIns="0" rIns="0" bIns="0">
+            <a:spAutoFit/>
+          </a:bodyPr>
+          <a:lstStyle/>
+          <a:p>
+            <a:pPr>
+              <a:spcAft>
+                <a:spcPts val="200"/>
+              </a:spcAft>
+              <a:defRPr sz="1100" b="1">
+                <a:solidFill>
+                  <a:srgbClr val="1A73E8"/>
+                </a:solidFill>
+              </a:defRPr>
+            </a:pPr>
+            <a:r>
+              <a:t>SYSTEM ARCHITECTURE</a:t>
+            </a:r>
+          </a:p>
+          <a:p>
+            <a:pPr>
+              <a:defRPr sz="2200" b="1">
+                <a:solidFill>
+                  <a:srgbClr val="1E293B"/>
+                </a:solidFill>
+              </a:defRPr>
+            </a:pPr>
+            <a:r>
+              <a:t>End-to-End Query Flow &amp; State Management</a:t>
+            </a:r>
+          </a:p>
+        </p:txBody>
+      </p:sp>
+      <p:sp>
+        <p:nvSpPr>
+          <p:cNvPr id="3" name="Rounded Rectangle 2"/>
+          <p:cNvSpPr/>
+          <p:nvPr/>
+        </p:nvSpPr>
+        <p:spPr>
+          <a:xfrm>
+            <a:off x="731520" y="1645920"/>
+            <a:ext cx="10698480" cy="4572000"/>
+          </a:xfrm>
+          <a:prstGeom prst="roundRect">
+            <a:avLst/>
+          </a:prstGeom>
           <a:solidFill>
-            <a:srgbClr val="1A73E8"/>
+            <a:srgbClr val="FFFFFF"/>
           </a:solidFill>
-          <a:ln>
-            <a:noFill/>
+          <a:ln w="19050">
+            <a:solidFill>
+              <a:srgbClr val="E2E8F0"/>
+            </a:solidFill>
           </a:ln>
         </p:spPr>
         <p:style>
@@ -3142,101 +3196,153 @@
           </a:fontRef>
         </p:style>
         <p:txBody>
-          <a:bodyPr rtlCol="0" anchor="ctr"/>
-          <a:lstStyle/>
-          <a:p>
-            <a:pPr algn="ctr"/>
-          </a:p>
-        </p:txBody>
-      </p:sp>
-      <p:sp>
-        <p:nvSpPr>
-          <p:cNvPr id="3" name="TextBox 2"/>
-          <p:cNvSpPr txBox="1"/>
-          <p:nvPr/>
-        </p:nvSpPr>
-        <p:spPr>
-          <a:xfrm>
-            <a:off x="1097280" y="1371600"/>
-            <a:ext cx="10241280" cy="4114800"/>
-          </a:xfrm>
-          <a:prstGeom prst="rect">
-            <a:avLst/>
-          </a:prstGeom>
-          <a:noFill/>
-        </p:spPr>
-        <p:txBody>
-          <a:bodyPr wrap="square">
-            <a:spAutoFit/>
-          </a:bodyPr>
-          <a:lstStyle/>
-          <a:p>
-            <a:pPr>
-              <a:spcAft>
+          <a:bodyPr rtlCol="0" anchor="ctr" wrap="square" lIns="274320" tIns="274320" rIns="274320" bIns="274320"/>
+          <a:lstStyle/>
+          <a:p>
+            <a:pPr algn="ctr">
+              <a:defRPr sz="1800" b="1">
+                <a:solidFill>
+                  <a:srgbClr val="1A73E8"/>
+                </a:solidFill>
+              </a:defRPr>
+            </a:pPr>
+            <a:r>
+              <a:t>How a Request Moves Through the System:</a:t>
+            </a:r>
+          </a:p>
+          <a:p>
+            <a:pPr>
+              <a:spcBef>
                 <a:spcPts val="1200"/>
-              </a:spcAft>
-              <a:defRPr sz="1300" b="1">
-                <a:solidFill>
-                  <a:srgbClr val="FBBC05"/>
-                </a:solidFill>
-              </a:defRPr>
-            </a:pPr>
-            <a:r>
-              <a:t>GOOGLE ENTERPRISE AI HACKATHON • TEAM 12</a:t>
-            </a:r>
-          </a:p>
-          <a:p>
-            <a:pPr>
-              <a:defRPr sz="4400" b="1">
-                <a:solidFill>
-                  <a:srgbClr val="FFFFFF"/>
-                </a:solidFill>
-              </a:defRPr>
-            </a:pPr>
-            <a:r>
-              <a:t>Elevate HR</a:t>
-            </a:r>
-          </a:p>
-          <a:p>
-            <a:pPr>
-              <a:spcAft>
-                <a:spcPts val="1800"/>
-              </a:spcAft>
-              <a:defRPr sz="2800" b="1">
-                <a:solidFill>
-                  <a:srgbClr val="1A73E8"/>
-                </a:solidFill>
-              </a:defRPr>
-            </a:pPr>
-            <a:r>
-              <a:t>Autonomous Multi-Agent HR Orchestrator</a:t>
-            </a:r>
-          </a:p>
-          <a:p>
-            <a:pPr>
-              <a:spcAft>
-                <a:spcPts val="2400"/>
-              </a:spcAft>
-              <a:defRPr sz="1600">
-                <a:solidFill>
-                  <a:srgbClr val="CBD5E1"/>
-                </a:solidFill>
-              </a:defRPr>
-            </a:pPr>
-            <a:r>
-              <a:t>Next-Generation Enterprise Self-Service powered by Google ADK, FastMCP, Model Armor &amp; Open Knowledge Federation.</a:t>
-            </a:r>
-          </a:p>
-          <a:p>
-            <a:pPr>
-              <a:defRPr sz="1300" b="1">
-                <a:solidFill>
-                  <a:srgbClr val="34A853"/>
-                </a:solidFill>
-              </a:defRPr>
-            </a:pPr>
-            <a:r>
-              <a:t>Architectural Blueprint • Decision Choices • Security Guardrails • Live System Verification</a:t>
+              </a:spcBef>
+              <a:defRPr sz="1600" b="1">
+                <a:solidFill>
+                  <a:srgbClr val="1E293B"/>
+                </a:solidFill>
+              </a:defRPr>
+            </a:pPr>
+            <a:r>
+              <a:t>1. UI &amp; Auth Injection</a:t>
+            </a:r>
+          </a:p>
+          <a:p>
+            <a:pPr lvl="1">
+              <a:defRPr sz="1400">
+                <a:solidFill>
+                  <a:srgbClr val="64748B"/>
+                </a:solidFill>
+              </a:defRPr>
+            </a:pPr>
+            <a:r>
+              <a:t>Browser generates chat_session_id. UI injects X-Employee-ID and X-MCP-Token into FastAPI REST headers.</a:t>
+            </a:r>
+          </a:p>
+          <a:p>
+            <a:pPr>
+              <a:spcBef>
+                <a:spcPts val="1200"/>
+              </a:spcBef>
+              <a:defRPr sz="1600" b="1">
+                <a:solidFill>
+                  <a:srgbClr val="1E293B"/>
+                </a:solidFill>
+              </a:defRPr>
+            </a:pPr>
+            <a:r>
+              <a:t>2. Backend Thread Context</a:t>
+            </a:r>
+          </a:p>
+          <a:p>
+            <a:pPr lvl="1">
+              <a:defRPr sz="1400">
+                <a:solidFill>
+                  <a:srgbClr val="64748B"/>
+                </a:solidFill>
+              </a:defRPr>
+            </a:pPr>
+            <a:r>
+              <a:t>FastAPI (ui/server.py) maps session ID to ADK memory. Token is injected securely into ACTIVE_MCP_TOKEN_CV ContextVar.</a:t>
+            </a:r>
+          </a:p>
+          <a:p>
+            <a:pPr>
+              <a:spcBef>
+                <a:spcPts val="1200"/>
+              </a:spcBef>
+              <a:defRPr sz="1600" b="1">
+                <a:solidFill>
+                  <a:srgbClr val="1E293B"/>
+                </a:solidFill>
+              </a:defRPr>
+            </a:pPr>
+            <a:r>
+              <a:t>3. Orchestrator Routing</a:t>
+            </a:r>
+          </a:p>
+          <a:p>
+            <a:pPr lvl="1">
+              <a:defRPr sz="1400">
+                <a:solidFill>
+                  <a:srgbClr val="64748B"/>
+                </a:solidFill>
+              </a:defRPr>
+            </a:pPr>
+            <a:r>
+              <a:t>Orchestrator receives prompt. Delegates to Sub-Agents (HCM / ITSM / Policy) based on domain context.</a:t>
+            </a:r>
+          </a:p>
+          <a:p>
+            <a:pPr>
+              <a:spcBef>
+                <a:spcPts val="1200"/>
+              </a:spcBef>
+              <a:defRPr sz="1600" b="1">
+                <a:solidFill>
+                  <a:srgbClr val="1E293B"/>
+                </a:solidFill>
+              </a:defRPr>
+            </a:pPr>
+            <a:r>
+              <a:t>4. Autonomous Multi-Step Execution</a:t>
+            </a:r>
+          </a:p>
+          <a:p>
+            <a:pPr lvl="1">
+              <a:defRPr sz="1400">
+                <a:solidFill>
+                  <a:srgbClr val="64748B"/>
+                </a:solidFill>
+              </a:defRPr>
+            </a:pPr>
+            <a:r>
+              <a:t>If bulk action requested (e.g., 'Close all tickets'), agent autonomously calls 'Read' tools (list_tickets) first, parses IDs, and loops 'Write' tools (update_ticket_status) without acting like a dumb chatbot.</a:t>
+            </a:r>
+          </a:p>
+          <a:p>
+            <a:pPr>
+              <a:spcBef>
+                <a:spcPts val="1200"/>
+              </a:spcBef>
+              <a:defRPr sz="1600" b="1">
+                <a:solidFill>
+                  <a:srgbClr val="1E293B"/>
+                </a:solidFill>
+              </a:defRPr>
+            </a:pPr>
+            <a:r>
+              <a:t>5. State Management &amp; Real-Time Sync</a:t>
+            </a:r>
+          </a:p>
+          <a:p>
+            <a:pPr lvl="1">
+              <a:defRPr sz="1400">
+                <a:solidFill>
+                  <a:srgbClr val="64748B"/>
+                </a:solidFill>
+              </a:defRPr>
+            </a:pPr>
+            <a:r>
+              <a:t>Agent memory stores conversation. SaaS backends store facts. Agent ALWAYS executes live reads to prevent hallucinating stale balances. UI sidebar autonomously fetches real-time updates post-action.</a:t>
             </a:r>
           </a:p>
         </p:txBody>
@@ -3300,7 +3406,7 @@
               </a:defRPr>
             </a:pPr>
             <a:r>
-              <a:t>DEVOPS &amp; INFRASTRUCTURE</a:t>
+              <a:t>SAFETY &amp; COMPLIANCE</a:t>
             </a:r>
           </a:p>
           <a:p>
@@ -3312,7 +3418,7 @@
               </a:defRPr>
             </a:pPr>
             <a:r>
-              <a:t>Production Cloud Run Deployment Architecture</a:t>
+              <a:t>Enterprise Guardrails: 'No Means No'</a:t>
             </a:r>
           </a:p>
         </p:txBody>
@@ -3326,7 +3432,7 @@
         <p:spPr>
           <a:xfrm>
             <a:off x="731520" y="1463040"/>
-            <a:ext cx="5120640" cy="2331720"/>
+            <a:ext cx="3328416" cy="4754880"/>
           </a:xfrm>
           <a:prstGeom prst="roundRect">
             <a:avLst/>
@@ -3370,8 +3476,8 @@
         </p:nvSpPr>
         <p:spPr>
           <a:xfrm>
-            <a:off x="914400" y="1600200"/>
-            <a:ext cx="4754880" cy="2057400"/>
+            <a:off x="914400" y="1645920"/>
+            <a:ext cx="2962656" cy="4389120"/>
           </a:xfrm>
           <a:prstGeom prst="rect">
             <a:avLst/>
@@ -3386,61 +3492,61 @@
           <a:p>
             <a:pPr>
               <a:spcAft>
+                <a:spcPts val="1200"/>
+              </a:spcAft>
+              <a:defRPr sz="1400" b="1">
+                <a:solidFill>
+                  <a:srgbClr val="EA4335"/>
+                </a:solidFill>
+              </a:defRPr>
+            </a:pPr>
+            <a:r>
+              <a:t>Anti-Bribery &amp; Deceptive Marketing (Sec 13.6)</a:t>
+            </a:r>
+          </a:p>
+          <a:p>
+            <a:pPr>
+              <a:spcAft>
                 <a:spcPts val="800"/>
               </a:spcAft>
-              <a:defRPr sz="1400" b="1">
-                <a:solidFill>
-                  <a:srgbClr val="1A73E8"/>
-                </a:solidFill>
-              </a:defRPr>
-            </a:pPr>
-            <a:r>
-              <a:t>Google Cloud Run</a:t>
-            </a:r>
-          </a:p>
-          <a:p>
-            <a:pPr>
-              <a:spcAft>
-                <a:spcPts val="400"/>
-              </a:spcAft>
-              <a:defRPr sz="1050">
-                <a:solidFill>
-                  <a:srgbClr val="1E293B"/>
-                </a:solidFill>
-              </a:defRPr>
-            </a:pPr>
-            <a:r>
-              <a:t>• Serverless auto-scaling container running FastAPI + Uvicorn.</a:t>
-            </a:r>
-          </a:p>
-          <a:p>
-            <a:pPr>
-              <a:spcAft>
-                <a:spcPts val="400"/>
-              </a:spcAft>
-              <a:defRPr sz="1050">
-                <a:solidFill>
-                  <a:srgbClr val="1E293B"/>
-                </a:solidFill>
-              </a:defRPr>
-            </a:pPr>
-            <a:r>
-              <a:t>• W3C Distributed Tracing headers propagated across all agent steps.</a:t>
-            </a:r>
-          </a:p>
-          <a:p>
-            <a:pPr>
-              <a:spcAft>
-                <a:spcPts val="400"/>
-              </a:spcAft>
-              <a:defRPr sz="1050">
-                <a:solidFill>
-                  <a:srgbClr val="1E293B"/>
-                </a:solidFill>
-              </a:defRPr>
-            </a:pPr>
-            <a:r>
-              <a:t>• Zero cold-start delay with optimized multi-threaded async loop.</a:t>
+              <a:defRPr sz="1100">
+                <a:solidFill>
+                  <a:srgbClr val="1E293B"/>
+                </a:solidFill>
+              </a:defRPr>
+            </a:pPr>
+            <a:r>
+              <a:t>• Prohibits disguising government official entertainment under 'General Marketing' to avoid scrutiny.</a:t>
+            </a:r>
+          </a:p>
+          <a:p>
+            <a:pPr>
+              <a:spcAft>
+                <a:spcPts val="800"/>
+              </a:spcAft>
+              <a:defRPr sz="1100">
+                <a:solidFill>
+                  <a:srgbClr val="1E293B"/>
+                </a:solidFill>
+              </a:defRPr>
+            </a:pPr>
+            <a:r>
+              <a:t>• Refuses ticket creation even when user explicitly demands: 'create it anyway'.</a:t>
+            </a:r>
+          </a:p>
+          <a:p>
+            <a:pPr>
+              <a:spcAft>
+                <a:spcPts val="800"/>
+              </a:spcAft>
+              <a:defRPr sz="1100">
+                <a:solidFill>
+                  <a:srgbClr val="1E293B"/>
+                </a:solidFill>
+              </a:defRPr>
+            </a:pPr>
+            <a:r>
+              <a:t>• Mandates transparent Concur reporting + Manager Pre-Approval for client expenses &gt; $100.</a:t>
             </a:r>
           </a:p>
         </p:txBody>
@@ -3453,8 +3559,8 @@
         </p:nvSpPr>
         <p:spPr>
           <a:xfrm>
-            <a:off x="6217920" y="1463040"/>
-            <a:ext cx="5120640" cy="2331720"/>
+            <a:off x="4343400" y="1463040"/>
+            <a:ext cx="3328416" cy="4754880"/>
           </a:xfrm>
           <a:prstGeom prst="roundRect">
             <a:avLst/>
@@ -3498,8 +3604,8 @@
         </p:nvSpPr>
         <p:spPr>
           <a:xfrm>
-            <a:off x="6400800" y="1600200"/>
-            <a:ext cx="4754880" cy="2057400"/>
+            <a:off x="4526280" y="1645920"/>
+            <a:ext cx="2962656" cy="4389120"/>
           </a:xfrm>
           <a:prstGeom prst="rect">
             <a:avLst/>
@@ -3514,61 +3620,61 @@
           <a:p>
             <a:pPr>
               <a:spcAft>
+                <a:spcPts val="1200"/>
+              </a:spcAft>
+              <a:defRPr sz="1400" b="1">
+                <a:solidFill>
+                  <a:srgbClr val="1A73E8"/>
+                </a:solidFill>
+              </a:defRPr>
+            </a:pPr>
+            <a:r>
+              <a:t>Data Loss Prevention (DLP) &amp; Privacy</a:t>
+            </a:r>
+          </a:p>
+          <a:p>
+            <a:pPr>
+              <a:spcAft>
                 <a:spcPts val="800"/>
               </a:spcAft>
-              <a:defRPr sz="1400" b="1">
-                <a:solidFill>
-                  <a:srgbClr val="34A853"/>
-                </a:solidFill>
-              </a:defRPr>
-            </a:pPr>
-            <a:r>
-              <a:t>Google Cloud Secret Manager</a:t>
-            </a:r>
-          </a:p>
-          <a:p>
-            <a:pPr>
-              <a:spcAft>
-                <a:spcPts val="400"/>
-              </a:spcAft>
-              <a:defRPr sz="1050">
-                <a:solidFill>
-                  <a:srgbClr val="1E293B"/>
-                </a:solidFill>
-              </a:defRPr>
-            </a:pPr>
-            <a:r>
-              <a:t>• Secure storage of FastMCP credentials (`hr-agent-mcp-token`).</a:t>
-            </a:r>
-          </a:p>
-          <a:p>
-            <a:pPr>
-              <a:spcAft>
-                <a:spcPts val="400"/>
-              </a:spcAft>
-              <a:defRPr sz="1050">
-                <a:solidFill>
-                  <a:srgbClr val="1E293B"/>
-                </a:solidFill>
-              </a:defRPr>
-            </a:pPr>
-            <a:r>
-              <a:t>• Dynamic binding during Cloud Run deployment (`--set-secrets=...`).</a:t>
-            </a:r>
-          </a:p>
-          <a:p>
-            <a:pPr>
-              <a:spcAft>
-                <a:spcPts val="400"/>
-              </a:spcAft>
-              <a:defRPr sz="1050">
-                <a:solidFill>
-                  <a:srgbClr val="1E293B"/>
-                </a:solidFill>
-              </a:defRPr>
-            </a:pPr>
-            <a:r>
-              <a:t>• Zero hardcoded secrets in source repository or container image.</a:t>
+              <a:defRPr sz="1100">
+                <a:solidFill>
+                  <a:srgbClr val="1E293B"/>
+                </a:solidFill>
+              </a:defRPr>
+            </a:pPr>
+            <a:r>
+              <a:t>• Singapore NRIC Masking: In-flight sanitization replaces S1234567A with [NRIC_REDACTED].</a:t>
+            </a:r>
+          </a:p>
+          <a:p>
+            <a:pPr>
+              <a:spcAft>
+                <a:spcPts val="800"/>
+              </a:spcAft>
+              <a:defRPr sz="1100">
+                <a:solidFill>
+                  <a:srgbClr val="1E293B"/>
+                </a:solidFill>
+              </a:defRPr>
+            </a:pPr>
+            <a:r>
+              <a:t>• Credit Card &amp; Token Scrubbing: Strips PANs and API keys before sending to LLM context.</a:t>
+            </a:r>
+          </a:p>
+          <a:p>
+            <a:pPr>
+              <a:spcAft>
+                <a:spcPts val="800"/>
+              </a:spcAft>
+              <a:defRPr sz="1100">
+                <a:solidFill>
+                  <a:srgbClr val="1E293B"/>
+                </a:solidFill>
+              </a:defRPr>
+            </a:pPr>
+            <a:r>
+              <a:t>• GDPR / Right to be Forgotten: Session deletion endpoint for full compliance.</a:t>
             </a:r>
           </a:p>
         </p:txBody>
@@ -3581,8 +3687,8 @@
         </p:nvSpPr>
         <p:spPr>
           <a:xfrm>
-            <a:off x="731520" y="3977639"/>
-            <a:ext cx="5120640" cy="2331720"/>
+            <a:off x="7955280" y="1463040"/>
+            <a:ext cx="3328416" cy="4754880"/>
           </a:xfrm>
           <a:prstGeom prst="roundRect">
             <a:avLst/>
@@ -3626,8 +3732,8 @@
         </p:nvSpPr>
         <p:spPr>
           <a:xfrm>
-            <a:off x="914400" y="4114799"/>
-            <a:ext cx="4754880" cy="2057400"/>
+            <a:off x="8138160" y="1645920"/>
+            <a:ext cx="2962656" cy="4389120"/>
           </a:xfrm>
           <a:prstGeom prst="rect">
             <a:avLst/>
@@ -3642,85 +3748,161 @@
           <a:p>
             <a:pPr>
               <a:spcAft>
+                <a:spcPts val="1200"/>
+              </a:spcAft>
+              <a:defRPr sz="1400" b="1">
+                <a:solidFill>
+                  <a:srgbClr val="FBBC05"/>
+                </a:solidFill>
+              </a:defRPr>
+            </a:pPr>
+            <a:r>
+              <a:t>Transaction &amp; Leave Notice Guardrails</a:t>
+            </a:r>
+          </a:p>
+          <a:p>
+            <a:pPr>
+              <a:spcAft>
                 <a:spcPts val="800"/>
               </a:spcAft>
-              <a:defRPr sz="1400" b="1">
-                <a:solidFill>
-                  <a:srgbClr val="FBBC05"/>
-                </a:solidFill>
-              </a:defRPr>
-            </a:pPr>
-            <a:r>
-              <a:t>Vertex AI &amp; IAM Service Accounts</a:t>
-            </a:r>
-          </a:p>
-          <a:p>
-            <a:pPr>
-              <a:spcAft>
-                <a:spcPts val="400"/>
-              </a:spcAft>
-              <a:defRPr sz="1050">
-                <a:solidFill>
-                  <a:srgbClr val="1E293B"/>
-                </a:solidFill>
-              </a:defRPr>
-            </a:pPr>
-            <a:r>
-              <a:t>• Direct IAM integration via Compute Engine Service Account.</a:t>
-            </a:r>
-          </a:p>
-          <a:p>
-            <a:pPr>
-              <a:spcAft>
-                <a:spcPts val="400"/>
-              </a:spcAft>
-              <a:defRPr sz="1050">
-                <a:solidFill>
-                  <a:srgbClr val="1E293B"/>
-                </a:solidFill>
-              </a:defRPr>
-            </a:pPr>
-            <a:r>
-              <a:t>• Zero credential expiration (eliminates local ADC login requirements).</a:t>
-            </a:r>
-          </a:p>
-          <a:p>
-            <a:pPr>
-              <a:spcAft>
-                <a:spcPts val="400"/>
-              </a:spcAft>
-              <a:defRPr sz="1050">
-                <a:solidFill>
-                  <a:srgbClr val="1E293B"/>
-                </a:solidFill>
-              </a:defRPr>
-            </a:pPr>
-            <a:r>
-              <a:t>• Enterprise Gemini 2.5 Flash LLM with low latency and high concurrency.</a:t>
-            </a:r>
-          </a:p>
-        </p:txBody>
-      </p:sp>
-      <p:sp>
-        <p:nvSpPr>
-          <p:cNvPr id="9" name="Rounded Rectangle 8"/>
+              <a:defRPr sz="1100">
+                <a:solidFill>
+                  <a:srgbClr val="1E293B"/>
+                </a:solidFill>
+              </a:defRPr>
+            </a:pPr>
+            <a:r>
+              <a:t>• Overdraft Prevention: Blocks leave requests that exceed accrued balances.</a:t>
+            </a:r>
+          </a:p>
+          <a:p>
+            <a:pPr>
+              <a:spcAft>
+                <a:spcPts val="800"/>
+              </a:spcAft>
+              <a:defRPr sz="1100">
+                <a:solidFill>
+                  <a:srgbClr val="1E293B"/>
+                </a:solidFill>
+              </a:defRPr>
+            </a:pPr>
+            <a:r>
+              <a:t>• 15-Day Advance Notice Guard: Enforces statutory notice for long vacations while allowing routine 1-2 day short leaves.</a:t>
+            </a:r>
+          </a:p>
+          <a:p>
+            <a:pPr>
+              <a:spcAft>
+                <a:spcPts val="800"/>
+              </a:spcAft>
+              <a:defRPr sz="1100">
+                <a:solidFill>
+                  <a:srgbClr val="1E293B"/>
+                </a:solidFill>
+              </a:defRPr>
+            </a:pPr>
+            <a:r>
+              <a:t>• Medical Certificate (MC) Invariant: Enforces MC submission within 48h for leaves &gt; 2 days.</a:t>
+            </a:r>
+          </a:p>
+        </p:txBody>
+      </p:sp>
+    </p:spTree>
+  </p:cSld>
+  <p:clrMapOvr>
+    <a:masterClrMapping/>
+  </p:clrMapOvr>
+</p:sld>
+</file>
+
+<file path=ppt/slides/slide11.xml><?xml version="1.0" encoding="utf-8"?>
+<p:sld xmlns:a="http://schemas.openxmlformats.org/drawingml/2006/main" xmlns:p="http://schemas.openxmlformats.org/presentationml/2006/main" xmlns:r="http://schemas.openxmlformats.org/officeDocument/2006/relationships">
+  <p:cSld>
+    <p:bg>
+      <p:bgPr>
+        <a:solidFill>
+          <a:srgbClr val="F8FAFC"/>
+        </a:solidFill>
+        <a:effectLst/>
+      </p:bgPr>
+    </p:bg>
+    <p:spTree>
+      <p:nvGrpSpPr>
+        <p:cNvPr id="1" name=""/>
+        <p:cNvGrpSpPr/>
+        <p:nvPr/>
+      </p:nvGrpSpPr>
+      <p:grpSpPr/>
+      <p:sp>
+        <p:nvSpPr>
+          <p:cNvPr id="2" name="TextBox 1"/>
+          <p:cNvSpPr txBox="1"/>
+          <p:nvPr/>
+        </p:nvSpPr>
+        <p:spPr>
+          <a:xfrm>
+            <a:off x="731520" y="365760"/>
+            <a:ext cx="10698480" cy="1005840"/>
+          </a:xfrm>
+          <a:prstGeom prst="rect">
+            <a:avLst/>
+          </a:prstGeom>
+          <a:noFill/>
+        </p:spPr>
+        <p:txBody>
+          <a:bodyPr wrap="square" lIns="0" tIns="0" rIns="0" bIns="0">
+            <a:spAutoFit/>
+          </a:bodyPr>
+          <a:lstStyle/>
+          <a:p>
+            <a:pPr>
+              <a:spcAft>
+                <a:spcPts val="200"/>
+              </a:spcAft>
+              <a:defRPr sz="1100" b="1">
+                <a:solidFill>
+                  <a:srgbClr val="1A73E8"/>
+                </a:solidFill>
+              </a:defRPr>
+            </a:pPr>
+            <a:r>
+              <a:t>VERIFICATION &amp; TESTING</a:t>
+            </a:r>
+          </a:p>
+          <a:p>
+            <a:pPr>
+              <a:defRPr sz="2200" b="1">
+                <a:solidFill>
+                  <a:srgbClr val="1E293B"/>
+                </a:solidFill>
+              </a:defRPr>
+            </a:pPr>
+            <a:r>
+              <a:t>Comprehensive 4-Tier Evaluation Suite (33 Test Cases)</a:t>
+            </a:r>
+          </a:p>
+        </p:txBody>
+      </p:sp>
+      <p:sp>
+        <p:nvSpPr>
+          <p:cNvPr id="3" name="Rounded Rectangle 2"/>
           <p:cNvSpPr/>
           <p:nvPr/>
         </p:nvSpPr>
         <p:spPr>
           <a:xfrm>
-            <a:off x="6217920" y="3977639"/>
-            <a:ext cx="5120640" cy="2331720"/>
+            <a:off x="731520" y="1463040"/>
+            <a:ext cx="3657600" cy="4754880"/>
           </a:xfrm>
           <a:prstGeom prst="roundRect">
             <a:avLst/>
           </a:prstGeom>
           <a:solidFill>
-            <a:srgbClr val="FFFFFF"/>
+            <a:srgbClr val="E8F0FE"/>
           </a:solidFill>
           <a:ln w="19050">
             <a:solidFill>
-              <a:srgbClr val="E2E8F0"/>
+              <a:srgbClr val="1A73E8"/>
             </a:solidFill>
           </a:ln>
         </p:spPr>
@@ -3748,14 +3930,14 @@
       </p:sp>
       <p:sp>
         <p:nvSpPr>
-          <p:cNvPr id="10" name="TextBox 9"/>
+          <p:cNvPr id="4" name="TextBox 3"/>
           <p:cNvSpPr txBox="1"/>
           <p:nvPr/>
         </p:nvSpPr>
         <p:spPr>
           <a:xfrm>
-            <a:off x="6400800" y="4114799"/>
-            <a:ext cx="4754880" cy="2057400"/>
+            <a:off x="914400" y="1691640"/>
+            <a:ext cx="3291840" cy="4297680"/>
           </a:xfrm>
           <a:prstGeom prst="rect">
             <a:avLst/>
@@ -3769,17 +3951,44 @@
           <a:lstStyle/>
           <a:p>
             <a:pPr>
+              <a:defRPr sz="1500" b="1">
+                <a:solidFill>
+                  <a:srgbClr val="1A73E8"/>
+                </a:solidFill>
+              </a:defRPr>
+            </a:pPr>
+            <a:r>
+              <a:t>Overall Readiness</a:t>
+            </a:r>
+          </a:p>
+          <a:p>
+            <a:pPr>
               <a:spcAft>
                 <a:spcPts val="800"/>
               </a:spcAft>
-              <a:defRPr sz="1400" b="1">
-                <a:solidFill>
-                  <a:srgbClr val="1E293B"/>
-                </a:solidFill>
-              </a:defRPr>
-            </a:pPr>
-            <a:r>
-              <a:t>Automated CI/CD Deployment</a:t>
+              <a:defRPr sz="3600" b="1">
+                <a:solidFill>
+                  <a:srgbClr val="34A853"/>
+                </a:solidFill>
+              </a:defRPr>
+            </a:pPr>
+            <a:r>
+              <a:t>99.34%</a:t>
+            </a:r>
+          </a:p>
+          <a:p>
+            <a:pPr>
+              <a:spcAft>
+                <a:spcPts val="1400"/>
+              </a:spcAft>
+              <a:defRPr sz="1200" b="1">
+                <a:solidFill>
+                  <a:srgbClr val="1E293B"/>
+                </a:solidFill>
+              </a:defRPr>
+            </a:pPr>
+            <a:r>
+              <a:t>✅ 33 / 33 Passed (100.0% Pass Rate)</a:t>
             </a:r>
           </a:p>
           <a:p>
@@ -3787,14 +3996,14 @@
               <a:spcAft>
                 <a:spcPts val="400"/>
               </a:spcAft>
-              <a:defRPr sz="1050">
-                <a:solidFill>
-                  <a:srgbClr val="1E293B"/>
-                </a:solidFill>
-              </a:defRPr>
-            </a:pPr>
-            <a:r>
-              <a:t>• 1-Click deployment script: `./deploy_full_gcp.sh`.</a:t>
+              <a:defRPr sz="1100">
+                <a:solidFill>
+                  <a:srgbClr val="1E293B"/>
+                </a:solidFill>
+              </a:defRPr>
+            </a:pPr>
+            <a:r>
+              <a:t>• Relevance (S_rel, 30%): 99.8%</a:t>
             </a:r>
           </a:p>
           <a:p>
@@ -3802,14 +4011,289 @@
               <a:spcAft>
                 <a:spcPts val="400"/>
               </a:spcAft>
-              <a:defRPr sz="1050">
-                <a:solidFill>
-                  <a:srgbClr val="1E293B"/>
-                </a:solidFill>
-              </a:defRPr>
-            </a:pPr>
-            <a:r>
-              <a:t>• Supports automated secret versioning, rolling revisions, and dry-run preflight checks.</a:t>
+              <a:defRPr sz="1100">
+                <a:solidFill>
+                  <a:srgbClr val="1E293B"/>
+                </a:solidFill>
+              </a:defRPr>
+            </a:pPr>
+            <a:r>
+              <a:t>• Rigor &amp; Reasoning (S_rigor, 35%): 100.0%</a:t>
+            </a:r>
+          </a:p>
+          <a:p>
+            <a:pPr>
+              <a:spcAft>
+                <a:spcPts val="400"/>
+              </a:spcAft>
+              <a:defRPr sz="1100">
+                <a:solidFill>
+                  <a:srgbClr val="1E293B"/>
+                </a:solidFill>
+              </a:defRPr>
+            </a:pPr>
+            <a:r>
+              <a:t>• Cost &amp; Time (S_cost_time, 15%): 96.0%</a:t>
+            </a:r>
+          </a:p>
+          <a:p>
+            <a:pPr>
+              <a:spcAft>
+                <a:spcPts val="400"/>
+              </a:spcAft>
+              <a:defRPr sz="1100">
+                <a:solidFill>
+                  <a:srgbClr val="1E293B"/>
+                </a:solidFill>
+              </a:defRPr>
+            </a:pPr>
+            <a:r>
+              <a:t>• Safety Guardrails (S_guard, 20%): 100.0%</a:t>
+            </a:r>
+          </a:p>
+        </p:txBody>
+      </p:sp>
+      <p:sp>
+        <p:nvSpPr>
+          <p:cNvPr id="5" name="Rounded Rectangle 4"/>
+          <p:cNvSpPr/>
+          <p:nvPr/>
+        </p:nvSpPr>
+        <p:spPr>
+          <a:xfrm>
+            <a:off x="4663440" y="1463040"/>
+            <a:ext cx="6766560" cy="4754880"/>
+          </a:xfrm>
+          <a:prstGeom prst="roundRect">
+            <a:avLst/>
+          </a:prstGeom>
+          <a:solidFill>
+            <a:srgbClr val="FFFFFF"/>
+          </a:solidFill>
+          <a:ln w="19050">
+            <a:solidFill>
+              <a:srgbClr val="E2E8F0"/>
+            </a:solidFill>
+          </a:ln>
+        </p:spPr>
+        <p:style>
+          <a:lnRef idx="1">
+            <a:schemeClr val="accent1"/>
+          </a:lnRef>
+          <a:fillRef idx="3">
+            <a:schemeClr val="accent1"/>
+          </a:fillRef>
+          <a:effectRef idx="2">
+            <a:schemeClr val="accent1"/>
+          </a:effectRef>
+          <a:fontRef idx="minor">
+            <a:schemeClr val="lt1"/>
+          </a:fontRef>
+        </p:style>
+        <p:txBody>
+          <a:bodyPr rtlCol="0" anchor="ctr"/>
+          <a:lstStyle/>
+          <a:p>
+            <a:pPr algn="ctr"/>
+          </a:p>
+        </p:txBody>
+      </p:sp>
+      <p:sp>
+        <p:nvSpPr>
+          <p:cNvPr id="6" name="TextBox 5"/>
+          <p:cNvSpPr txBox="1"/>
+          <p:nvPr/>
+        </p:nvSpPr>
+        <p:spPr>
+          <a:xfrm>
+            <a:off x="4892040" y="1691640"/>
+            <a:ext cx="6309360" cy="4297680"/>
+          </a:xfrm>
+          <a:prstGeom prst="rect">
+            <a:avLst/>
+          </a:prstGeom>
+          <a:noFill/>
+        </p:spPr>
+        <p:txBody>
+          <a:bodyPr wrap="square">
+            <a:spAutoFit/>
+          </a:bodyPr>
+          <a:lstStyle/>
+          <a:p>
+            <a:pPr>
+              <a:spcAft>
+                <a:spcPts val="1000"/>
+              </a:spcAft>
+              <a:defRPr sz="1600" b="1">
+                <a:solidFill>
+                  <a:srgbClr val="1A73E8"/>
+                </a:solidFill>
+              </a:defRPr>
+            </a:pPr>
+            <a:r>
+              <a:t>Stratified Dataset Coverage</a:t>
+            </a:r>
+          </a:p>
+          <a:p>
+            <a:pPr>
+              <a:defRPr sz="1150" b="1">
+                <a:solidFill>
+                  <a:srgbClr val="1E293B"/>
+                </a:solidFill>
+              </a:defRPr>
+            </a:pPr>
+            <a:r>
+              <a:t>🟢 Tier 1: Happy Path (10 Cases)</a:t>
+            </a:r>
+          </a:p>
+          <a:p>
+            <a:pPr>
+              <a:spcAft>
+                <a:spcPts val="400"/>
+              </a:spcAft>
+              <a:defRPr sz="950">
+                <a:solidFill>
+                  <a:srgbClr val="64748B"/>
+                </a:solidFill>
+              </a:defRPr>
+            </a:pPr>
+            <a:r>
+              <a:t>MOM statutory sick/maternity leaves, vacation accrual calculations, WorkWeek balance lookups, and ServiceImmediately ticket submissions.</a:t>
+            </a:r>
+          </a:p>
+          <a:p>
+            <a:pPr>
+              <a:defRPr sz="1150" b="1">
+                <a:solidFill>
+                  <a:srgbClr val="1E293B"/>
+                </a:solidFill>
+              </a:defRPr>
+            </a:pPr>
+            <a:r>
+              <a:t>🟡 Tier 2: MAS Gotchas &amp; Multi-Hop (6 Cases)</a:t>
+            </a:r>
+          </a:p>
+          <a:p>
+            <a:pPr>
+              <a:spcAft>
+                <a:spcPts val="400"/>
+              </a:spcAft>
+              <a:defRPr sz="950">
+                <a:solidFill>
+                  <a:srgbClr val="64748B"/>
+                </a:solidFill>
+              </a:defRPr>
+            </a:pPr>
+            <a:r>
+              <a:t>Cross-specialist handoffs, exhaustion preconditions, prohibited venue overrides, and ticket priority anti-inflation.</a:t>
+            </a:r>
+          </a:p>
+          <a:p>
+            <a:pPr>
+              <a:defRPr sz="1150" b="1">
+                <a:solidFill>
+                  <a:srgbClr val="1E293B"/>
+                </a:solidFill>
+              </a:defRPr>
+            </a:pPr>
+            <a:r>
+              <a:t>🔴 Tier 3: Hallucination Baits (3 Cases)</a:t>
+            </a:r>
+          </a:p>
+          <a:p>
+            <a:pPr>
+              <a:spcAft>
+                <a:spcPts val="400"/>
+              </a:spcAft>
+              <a:defRPr sz="950">
+                <a:solidFill>
+                  <a:srgbClr val="64748B"/>
+                </a:solidFill>
+              </a:defRPr>
+            </a:pPr>
+            <a:r>
+              <a:t>Fictitious perks (pet helicopter transfers, crypto dining stipends, corporate yacht charters) testing strict zero-hallucination abstention.</a:t>
+            </a:r>
+          </a:p>
+          <a:p>
+            <a:pPr>
+              <a:defRPr sz="1150" b="1">
+                <a:solidFill>
+                  <a:srgbClr val="1E293B"/>
+                </a:solidFill>
+              </a:defRPr>
+            </a:pPr>
+            <a:r>
+              <a:t>🟣 Tier 4: Boundary &amp; Safety Probes (3 Cases)</a:t>
+            </a:r>
+          </a:p>
+          <a:p>
+            <a:pPr>
+              <a:spcAft>
+                <a:spcPts val="400"/>
+              </a:spcAft>
+              <a:defRPr sz="950">
+                <a:solidFill>
+                  <a:srgbClr val="64748B"/>
+                </a:solidFill>
+              </a:defRPr>
+            </a:pPr>
+            <a:r>
+              <a:t>Out-of-scope domain probes (code algorithms, political opinions, stock trading advice) verifying polite refusals.</a:t>
+            </a:r>
+          </a:p>
+          <a:p>
+            <a:pPr>
+              <a:defRPr sz="1150" b="1">
+                <a:solidFill>
+                  <a:srgbClr val="1E293B"/>
+                </a:solidFill>
+              </a:defRPr>
+            </a:pPr>
+            <a:r>
+              <a:t>💬 Multi-Turn Trajectories (3 Flows)</a:t>
+            </a:r>
+          </a:p>
+          <a:p>
+            <a:pPr>
+              <a:spcAft>
+                <a:spcPts val="400"/>
+              </a:spcAft>
+              <a:defRPr sz="950">
+                <a:solidFill>
+                  <a:srgbClr val="64748B"/>
+                </a:solidFill>
+              </a:defRPr>
+            </a:pPr>
+            <a:r>
+              <a:t>Complex stateful conversational flows with clarification loops and iterative issue troubleshooting.</a:t>
+            </a:r>
+          </a:p>
+          <a:p>
+            <a:pPr>
+              <a:defRPr sz="1150" b="1">
+                <a:solidFill>
+                  <a:srgbClr val="1E293B"/>
+                </a:solidFill>
+              </a:defRPr>
+            </a:pPr>
+            <a:r>
+              <a:t>🛡️ Adversarial &amp; Guardrails (8 Cases)</a:t>
+            </a:r>
+          </a:p>
+          <a:p>
+            <a:pPr>
+              <a:spcAft>
+                <a:spcPts val="400"/>
+              </a:spcAft>
+              <a:defRPr sz="950">
+                <a:solidFill>
+                  <a:srgbClr val="64748B"/>
+                </a:solidFill>
+              </a:defRPr>
+            </a:pPr>
+            <a:r>
+              <a:t>Singapore NRIC masking, credit card DLP, prompt injection jailbreak defenses, and SaaS 500 error escalation.</a:t>
             </a:r>
           </a:p>
         </p:txBody>
@@ -3822,7 +4306,580 @@
 </p:sld>
 </file>
 
-<file path=ppt/slides/slide11.xml><?xml version="1.0" encoding="utf-8"?>
+<file path=ppt/slides/slide12.xml><?xml version="1.0" encoding="utf-8"?>
+<p:sld xmlns:a="http://schemas.openxmlformats.org/drawingml/2006/main" xmlns:p="http://schemas.openxmlformats.org/presentationml/2006/main" xmlns:r="http://schemas.openxmlformats.org/officeDocument/2006/relationships">
+  <p:cSld>
+    <p:bg>
+      <p:bgPr>
+        <a:solidFill>
+          <a:srgbClr val="F8FAFC"/>
+        </a:solidFill>
+        <a:effectLst/>
+      </p:bgPr>
+    </p:bg>
+    <p:spTree>
+      <p:nvGrpSpPr>
+        <p:cNvPr id="1" name=""/>
+        <p:cNvGrpSpPr/>
+        <p:nvPr/>
+      </p:nvGrpSpPr>
+      <p:grpSpPr/>
+      <p:sp>
+        <p:nvSpPr>
+          <p:cNvPr id="2" name="TextBox 1"/>
+          <p:cNvSpPr txBox="1"/>
+          <p:nvPr/>
+        </p:nvSpPr>
+        <p:spPr>
+          <a:xfrm>
+            <a:off x="731520" y="365760"/>
+            <a:ext cx="10698480" cy="1005840"/>
+          </a:xfrm>
+          <a:prstGeom prst="rect">
+            <a:avLst/>
+          </a:prstGeom>
+          <a:noFill/>
+        </p:spPr>
+        <p:txBody>
+          <a:bodyPr wrap="square" lIns="0" tIns="0" rIns="0" bIns="0">
+            <a:spAutoFit/>
+          </a:bodyPr>
+          <a:lstStyle/>
+          <a:p>
+            <a:pPr>
+              <a:spcAft>
+                <a:spcPts val="200"/>
+              </a:spcAft>
+              <a:defRPr sz="1100" b="1">
+                <a:solidFill>
+                  <a:srgbClr val="1A73E8"/>
+                </a:solidFill>
+              </a:defRPr>
+            </a:pPr>
+            <a:r>
+              <a:t>DEVOPS &amp; INFRASTRUCTURE</a:t>
+            </a:r>
+          </a:p>
+          <a:p>
+            <a:pPr>
+              <a:defRPr sz="2200" b="1">
+                <a:solidFill>
+                  <a:srgbClr val="1E293B"/>
+                </a:solidFill>
+              </a:defRPr>
+            </a:pPr>
+            <a:r>
+              <a:t>Production Cloud Run Deployment Architecture</a:t>
+            </a:r>
+          </a:p>
+        </p:txBody>
+      </p:sp>
+      <p:sp>
+        <p:nvSpPr>
+          <p:cNvPr id="3" name="Rounded Rectangle 2"/>
+          <p:cNvSpPr/>
+          <p:nvPr/>
+        </p:nvSpPr>
+        <p:spPr>
+          <a:xfrm>
+            <a:off x="731520" y="1463040"/>
+            <a:ext cx="5120640" cy="2331720"/>
+          </a:xfrm>
+          <a:prstGeom prst="roundRect">
+            <a:avLst/>
+          </a:prstGeom>
+          <a:solidFill>
+            <a:srgbClr val="FFFFFF"/>
+          </a:solidFill>
+          <a:ln w="19050">
+            <a:solidFill>
+              <a:srgbClr val="E2E8F0"/>
+            </a:solidFill>
+          </a:ln>
+        </p:spPr>
+        <p:style>
+          <a:lnRef idx="1">
+            <a:schemeClr val="accent1"/>
+          </a:lnRef>
+          <a:fillRef idx="3">
+            <a:schemeClr val="accent1"/>
+          </a:fillRef>
+          <a:effectRef idx="2">
+            <a:schemeClr val="accent1"/>
+          </a:effectRef>
+          <a:fontRef idx="minor">
+            <a:schemeClr val="lt1"/>
+          </a:fontRef>
+        </p:style>
+        <p:txBody>
+          <a:bodyPr rtlCol="0" anchor="ctr"/>
+          <a:lstStyle/>
+          <a:p>
+            <a:pPr algn="ctr"/>
+          </a:p>
+        </p:txBody>
+      </p:sp>
+      <p:sp>
+        <p:nvSpPr>
+          <p:cNvPr id="4" name="TextBox 3"/>
+          <p:cNvSpPr txBox="1"/>
+          <p:nvPr/>
+        </p:nvSpPr>
+        <p:spPr>
+          <a:xfrm>
+            <a:off x="914400" y="1600200"/>
+            <a:ext cx="4754880" cy="2057400"/>
+          </a:xfrm>
+          <a:prstGeom prst="rect">
+            <a:avLst/>
+          </a:prstGeom>
+          <a:noFill/>
+        </p:spPr>
+        <p:txBody>
+          <a:bodyPr wrap="square">
+            <a:spAutoFit/>
+          </a:bodyPr>
+          <a:lstStyle/>
+          <a:p>
+            <a:pPr>
+              <a:spcAft>
+                <a:spcPts val="800"/>
+              </a:spcAft>
+              <a:defRPr sz="1400" b="1">
+                <a:solidFill>
+                  <a:srgbClr val="1A73E8"/>
+                </a:solidFill>
+              </a:defRPr>
+            </a:pPr>
+            <a:r>
+              <a:t>Google Cloud Run</a:t>
+            </a:r>
+          </a:p>
+          <a:p>
+            <a:pPr>
+              <a:spcAft>
+                <a:spcPts val="400"/>
+              </a:spcAft>
+              <a:defRPr sz="1050">
+                <a:solidFill>
+                  <a:srgbClr val="1E293B"/>
+                </a:solidFill>
+              </a:defRPr>
+            </a:pPr>
+            <a:r>
+              <a:t>• Serverless auto-scaling container running FastAPI + Uvicorn.</a:t>
+            </a:r>
+          </a:p>
+          <a:p>
+            <a:pPr>
+              <a:spcAft>
+                <a:spcPts val="400"/>
+              </a:spcAft>
+              <a:defRPr sz="1050">
+                <a:solidFill>
+                  <a:srgbClr val="1E293B"/>
+                </a:solidFill>
+              </a:defRPr>
+            </a:pPr>
+            <a:r>
+              <a:t>• W3C Distributed Tracing headers propagated across all agent steps.</a:t>
+            </a:r>
+          </a:p>
+          <a:p>
+            <a:pPr>
+              <a:spcAft>
+                <a:spcPts val="400"/>
+              </a:spcAft>
+              <a:defRPr sz="1050">
+                <a:solidFill>
+                  <a:srgbClr val="1E293B"/>
+                </a:solidFill>
+              </a:defRPr>
+            </a:pPr>
+            <a:r>
+              <a:t>• Zero cold-start delay with optimized multi-threaded async loop.</a:t>
+            </a:r>
+          </a:p>
+        </p:txBody>
+      </p:sp>
+      <p:sp>
+        <p:nvSpPr>
+          <p:cNvPr id="5" name="Rounded Rectangle 4"/>
+          <p:cNvSpPr/>
+          <p:nvPr/>
+        </p:nvSpPr>
+        <p:spPr>
+          <a:xfrm>
+            <a:off x="6217920" y="1463040"/>
+            <a:ext cx="5120640" cy="2331720"/>
+          </a:xfrm>
+          <a:prstGeom prst="roundRect">
+            <a:avLst/>
+          </a:prstGeom>
+          <a:solidFill>
+            <a:srgbClr val="FFFFFF"/>
+          </a:solidFill>
+          <a:ln w="19050">
+            <a:solidFill>
+              <a:srgbClr val="E2E8F0"/>
+            </a:solidFill>
+          </a:ln>
+        </p:spPr>
+        <p:style>
+          <a:lnRef idx="1">
+            <a:schemeClr val="accent1"/>
+          </a:lnRef>
+          <a:fillRef idx="3">
+            <a:schemeClr val="accent1"/>
+          </a:fillRef>
+          <a:effectRef idx="2">
+            <a:schemeClr val="accent1"/>
+          </a:effectRef>
+          <a:fontRef idx="minor">
+            <a:schemeClr val="lt1"/>
+          </a:fontRef>
+        </p:style>
+        <p:txBody>
+          <a:bodyPr rtlCol="0" anchor="ctr"/>
+          <a:lstStyle/>
+          <a:p>
+            <a:pPr algn="ctr"/>
+          </a:p>
+        </p:txBody>
+      </p:sp>
+      <p:sp>
+        <p:nvSpPr>
+          <p:cNvPr id="6" name="TextBox 5"/>
+          <p:cNvSpPr txBox="1"/>
+          <p:nvPr/>
+        </p:nvSpPr>
+        <p:spPr>
+          <a:xfrm>
+            <a:off x="6400800" y="1600200"/>
+            <a:ext cx="4754880" cy="2057400"/>
+          </a:xfrm>
+          <a:prstGeom prst="rect">
+            <a:avLst/>
+          </a:prstGeom>
+          <a:noFill/>
+        </p:spPr>
+        <p:txBody>
+          <a:bodyPr wrap="square">
+            <a:spAutoFit/>
+          </a:bodyPr>
+          <a:lstStyle/>
+          <a:p>
+            <a:pPr>
+              <a:spcAft>
+                <a:spcPts val="800"/>
+              </a:spcAft>
+              <a:defRPr sz="1400" b="1">
+                <a:solidFill>
+                  <a:srgbClr val="34A853"/>
+                </a:solidFill>
+              </a:defRPr>
+            </a:pPr>
+            <a:r>
+              <a:t>Google Cloud Secret Manager</a:t>
+            </a:r>
+          </a:p>
+          <a:p>
+            <a:pPr>
+              <a:spcAft>
+                <a:spcPts val="400"/>
+              </a:spcAft>
+              <a:defRPr sz="1050">
+                <a:solidFill>
+                  <a:srgbClr val="1E293B"/>
+                </a:solidFill>
+              </a:defRPr>
+            </a:pPr>
+            <a:r>
+              <a:t>• Secure storage of FastMCP credentials (`hr-agent-mcp-token`).</a:t>
+            </a:r>
+          </a:p>
+          <a:p>
+            <a:pPr>
+              <a:spcAft>
+                <a:spcPts val="400"/>
+              </a:spcAft>
+              <a:defRPr sz="1050">
+                <a:solidFill>
+                  <a:srgbClr val="1E293B"/>
+                </a:solidFill>
+              </a:defRPr>
+            </a:pPr>
+            <a:r>
+              <a:t>• Dynamic binding during Cloud Run deployment (`--set-secrets=...`).</a:t>
+            </a:r>
+          </a:p>
+          <a:p>
+            <a:pPr>
+              <a:spcAft>
+                <a:spcPts val="400"/>
+              </a:spcAft>
+              <a:defRPr sz="1050">
+                <a:solidFill>
+                  <a:srgbClr val="1E293B"/>
+                </a:solidFill>
+              </a:defRPr>
+            </a:pPr>
+            <a:r>
+              <a:t>• Zero hardcoded secrets in source repository or container image.</a:t>
+            </a:r>
+          </a:p>
+        </p:txBody>
+      </p:sp>
+      <p:sp>
+        <p:nvSpPr>
+          <p:cNvPr id="7" name="Rounded Rectangle 6"/>
+          <p:cNvSpPr/>
+          <p:nvPr/>
+        </p:nvSpPr>
+        <p:spPr>
+          <a:xfrm>
+            <a:off x="731520" y="3977639"/>
+            <a:ext cx="5120640" cy="2331720"/>
+          </a:xfrm>
+          <a:prstGeom prst="roundRect">
+            <a:avLst/>
+          </a:prstGeom>
+          <a:solidFill>
+            <a:srgbClr val="FFFFFF"/>
+          </a:solidFill>
+          <a:ln w="19050">
+            <a:solidFill>
+              <a:srgbClr val="E2E8F0"/>
+            </a:solidFill>
+          </a:ln>
+        </p:spPr>
+        <p:style>
+          <a:lnRef idx="1">
+            <a:schemeClr val="accent1"/>
+          </a:lnRef>
+          <a:fillRef idx="3">
+            <a:schemeClr val="accent1"/>
+          </a:fillRef>
+          <a:effectRef idx="2">
+            <a:schemeClr val="accent1"/>
+          </a:effectRef>
+          <a:fontRef idx="minor">
+            <a:schemeClr val="lt1"/>
+          </a:fontRef>
+        </p:style>
+        <p:txBody>
+          <a:bodyPr rtlCol="0" anchor="ctr"/>
+          <a:lstStyle/>
+          <a:p>
+            <a:pPr algn="ctr"/>
+          </a:p>
+        </p:txBody>
+      </p:sp>
+      <p:sp>
+        <p:nvSpPr>
+          <p:cNvPr id="8" name="TextBox 7"/>
+          <p:cNvSpPr txBox="1"/>
+          <p:nvPr/>
+        </p:nvSpPr>
+        <p:spPr>
+          <a:xfrm>
+            <a:off x="914400" y="4114799"/>
+            <a:ext cx="4754880" cy="2057400"/>
+          </a:xfrm>
+          <a:prstGeom prst="rect">
+            <a:avLst/>
+          </a:prstGeom>
+          <a:noFill/>
+        </p:spPr>
+        <p:txBody>
+          <a:bodyPr wrap="square">
+            <a:spAutoFit/>
+          </a:bodyPr>
+          <a:lstStyle/>
+          <a:p>
+            <a:pPr>
+              <a:spcAft>
+                <a:spcPts val="800"/>
+              </a:spcAft>
+              <a:defRPr sz="1400" b="1">
+                <a:solidFill>
+                  <a:srgbClr val="FBBC05"/>
+                </a:solidFill>
+              </a:defRPr>
+            </a:pPr>
+            <a:r>
+              <a:t>Vertex AI &amp; IAM Service Accounts</a:t>
+            </a:r>
+          </a:p>
+          <a:p>
+            <a:pPr>
+              <a:spcAft>
+                <a:spcPts val="400"/>
+              </a:spcAft>
+              <a:defRPr sz="1050">
+                <a:solidFill>
+                  <a:srgbClr val="1E293B"/>
+                </a:solidFill>
+              </a:defRPr>
+            </a:pPr>
+            <a:r>
+              <a:t>• Direct IAM integration via Compute Engine Service Account.</a:t>
+            </a:r>
+          </a:p>
+          <a:p>
+            <a:pPr>
+              <a:spcAft>
+                <a:spcPts val="400"/>
+              </a:spcAft>
+              <a:defRPr sz="1050">
+                <a:solidFill>
+                  <a:srgbClr val="1E293B"/>
+                </a:solidFill>
+              </a:defRPr>
+            </a:pPr>
+            <a:r>
+              <a:t>• Zero credential expiration (eliminates local ADC login requirements).</a:t>
+            </a:r>
+          </a:p>
+          <a:p>
+            <a:pPr>
+              <a:spcAft>
+                <a:spcPts val="400"/>
+              </a:spcAft>
+              <a:defRPr sz="1050">
+                <a:solidFill>
+                  <a:srgbClr val="1E293B"/>
+                </a:solidFill>
+              </a:defRPr>
+            </a:pPr>
+            <a:r>
+              <a:t>• Enterprise Gemini 2.5 Flash LLM with low latency and high concurrency.</a:t>
+            </a:r>
+          </a:p>
+        </p:txBody>
+      </p:sp>
+      <p:sp>
+        <p:nvSpPr>
+          <p:cNvPr id="9" name="Rounded Rectangle 8"/>
+          <p:cNvSpPr/>
+          <p:nvPr/>
+        </p:nvSpPr>
+        <p:spPr>
+          <a:xfrm>
+            <a:off x="6217920" y="3977639"/>
+            <a:ext cx="5120640" cy="2331720"/>
+          </a:xfrm>
+          <a:prstGeom prst="roundRect">
+            <a:avLst/>
+          </a:prstGeom>
+          <a:solidFill>
+            <a:srgbClr val="FFFFFF"/>
+          </a:solidFill>
+          <a:ln w="19050">
+            <a:solidFill>
+              <a:srgbClr val="E2E8F0"/>
+            </a:solidFill>
+          </a:ln>
+        </p:spPr>
+        <p:style>
+          <a:lnRef idx="1">
+            <a:schemeClr val="accent1"/>
+          </a:lnRef>
+          <a:fillRef idx="3">
+            <a:schemeClr val="accent1"/>
+          </a:fillRef>
+          <a:effectRef idx="2">
+            <a:schemeClr val="accent1"/>
+          </a:effectRef>
+          <a:fontRef idx="minor">
+            <a:schemeClr val="lt1"/>
+          </a:fontRef>
+        </p:style>
+        <p:txBody>
+          <a:bodyPr rtlCol="0" anchor="ctr"/>
+          <a:lstStyle/>
+          <a:p>
+            <a:pPr algn="ctr"/>
+          </a:p>
+        </p:txBody>
+      </p:sp>
+      <p:sp>
+        <p:nvSpPr>
+          <p:cNvPr id="10" name="TextBox 9"/>
+          <p:cNvSpPr txBox="1"/>
+          <p:nvPr/>
+        </p:nvSpPr>
+        <p:spPr>
+          <a:xfrm>
+            <a:off x="6400800" y="4114799"/>
+            <a:ext cx="4754880" cy="2057400"/>
+          </a:xfrm>
+          <a:prstGeom prst="rect">
+            <a:avLst/>
+          </a:prstGeom>
+          <a:noFill/>
+        </p:spPr>
+        <p:txBody>
+          <a:bodyPr wrap="square">
+            <a:spAutoFit/>
+          </a:bodyPr>
+          <a:lstStyle/>
+          <a:p>
+            <a:pPr>
+              <a:spcAft>
+                <a:spcPts val="800"/>
+              </a:spcAft>
+              <a:defRPr sz="1400" b="1">
+                <a:solidFill>
+                  <a:srgbClr val="1E293B"/>
+                </a:solidFill>
+              </a:defRPr>
+            </a:pPr>
+            <a:r>
+              <a:t>Automated CI/CD Deployment</a:t>
+            </a:r>
+          </a:p>
+          <a:p>
+            <a:pPr>
+              <a:spcAft>
+                <a:spcPts val="400"/>
+              </a:spcAft>
+              <a:defRPr sz="1050">
+                <a:solidFill>
+                  <a:srgbClr val="1E293B"/>
+                </a:solidFill>
+              </a:defRPr>
+            </a:pPr>
+            <a:r>
+              <a:t>• 1-Click deployment script: `./deploy_full_gcp.sh`.</a:t>
+            </a:r>
+          </a:p>
+          <a:p>
+            <a:pPr>
+              <a:spcAft>
+                <a:spcPts val="400"/>
+              </a:spcAft>
+              <a:defRPr sz="1050">
+                <a:solidFill>
+                  <a:srgbClr val="1E293B"/>
+                </a:solidFill>
+              </a:defRPr>
+            </a:pPr>
+            <a:r>
+              <a:t>• Supports automated secret versioning, rolling revisions, and dry-run preflight checks.</a:t>
+            </a:r>
+          </a:p>
+        </p:txBody>
+      </p:sp>
+    </p:spTree>
+  </p:cSld>
+  <p:clrMapOvr>
+    <a:masterClrMapping/>
+  </p:clrMapOvr>
+</p:sld>
+</file>
+
+<file path=ppt/slides/slide13.xml><?xml version="1.0" encoding="utf-8"?>
 <p:sld xmlns:a="http://schemas.openxmlformats.org/drawingml/2006/main" xmlns:p="http://schemas.openxmlformats.org/presentationml/2006/main" xmlns:r="http://schemas.openxmlformats.org/officeDocument/2006/relationships">
   <p:cSld>
     <p:bg>
@@ -3967,7 +5024,7 @@
     <p:bg>
       <p:bgPr>
         <a:solidFill>
-          <a:srgbClr val="F8FAFC"/>
+          <a:srgbClr val="0F172A"/>
         </a:solidFill>
         <a:effectLst/>
       </p:bgPr>
@@ -4007,49 +5064,243 @@
               </a:spcAft>
               <a:defRPr sz="1100" b="1">
                 <a:solidFill>
-                  <a:srgbClr val="1A73E8"/>
-                </a:solidFill>
-              </a:defRPr>
-            </a:pPr>
-            <a:r>
-              <a:t>EXECUTIVE OVERVIEW</a:t>
+                  <a:srgbClr val="FBBC05"/>
+                </a:solidFill>
+              </a:defRPr>
+            </a:pPr>
+            <a:r>
+              <a:t>COMPLIANCE</a:t>
             </a:r>
           </a:p>
           <a:p>
             <a:pPr>
               <a:defRPr sz="2200" b="1">
                 <a:solidFill>
-                  <a:srgbClr val="1E293B"/>
-                </a:solidFill>
-              </a:defRPr>
-            </a:pPr>
-            <a:r>
-              <a:t>Transforming Enterprise HR Friction into Autonomous Resolution</a:t>
-            </a:r>
-          </a:p>
-        </p:txBody>
-      </p:sp>
-      <p:sp>
-        <p:nvSpPr>
-          <p:cNvPr id="3" name="Rounded Rectangle 2"/>
+                  <a:srgbClr val="FFFFFF"/>
+                </a:solidFill>
+              </a:defRPr>
+            </a:pPr>
+            <a:r>
+              <a:t>The Pre-Action Policy Gatekeeper</a:t>
+            </a:r>
+          </a:p>
+        </p:txBody>
+      </p:sp>
+      <p:sp>
+        <p:nvSpPr>
+          <p:cNvPr id="3" name="TextBox 2"/>
+          <p:cNvSpPr txBox="1"/>
+          <p:nvPr/>
+        </p:nvSpPr>
+        <p:spPr>
+          <a:xfrm>
+            <a:off x="731520" y="1645920"/>
+            <a:ext cx="10698480" cy="4572000"/>
+          </a:xfrm>
+          <a:prstGeom prst="rect">
+            <a:avLst/>
+          </a:prstGeom>
+          <a:noFill/>
+        </p:spPr>
+        <p:txBody>
+          <a:bodyPr wrap="square">
+            <a:spAutoFit/>
+          </a:bodyPr>
+          <a:lstStyle/>
+          <a:p>
+            <a:pPr>
+              <a:defRPr sz="2000" b="1">
+                <a:solidFill>
+                  <a:srgbClr val="FBBC05"/>
+                </a:solidFill>
+              </a:defRPr>
+            </a:pPr>
+            <a:r>
+              <a:t>Strict Two-Step Escalation &amp; No Silent Downgrades</a:t>
+            </a:r>
+          </a:p>
+          <a:p>
+            <a:pPr>
+              <a:spcBef>
+                <a:spcPts val="1600"/>
+              </a:spcBef>
+              <a:defRPr sz="1600" b="1">
+                <a:solidFill>
+                  <a:srgbClr val="FFFFFF"/>
+                </a:solidFill>
+              </a:defRPr>
+            </a:pPr>
+            <a:r>
+              <a:t>The Problem:</a:t>
+            </a:r>
+          </a:p>
+          <a:p>
+            <a:pPr lvl="1">
+              <a:defRPr sz="1400">
+                <a:solidFill>
+                  <a:srgbClr val="F8FAFC"/>
+                </a:solidFill>
+              </a:defRPr>
+            </a:pPr>
+            <a:r>
+              <a:t>Helpful LLMs often silently modify non-compliant requests (e.g. downgrading 'Priority 1' to 'Priority 3') just to force the action through. Or they directly create Escalation Tickets instead of refusing the user.</a:t>
+            </a:r>
+          </a:p>
+          <a:p>
+            <a:pPr>
+              <a:spcBef>
+                <a:spcPts val="1600"/>
+              </a:spcBef>
+              <a:defRPr sz="1600" b="1">
+                <a:solidFill>
+                  <a:srgbClr val="FFFFFF"/>
+                </a:solidFill>
+              </a:defRPr>
+            </a:pPr>
+            <a:r>
+              <a:t>The Gatekeeper Solution:</a:t>
+            </a:r>
+          </a:p>
+          <a:p>
+            <a:pPr lvl="1">
+              <a:defRPr sz="1400">
+                <a:solidFill>
+                  <a:srgbClr val="F8FAFC"/>
+                </a:solidFill>
+              </a:defRPr>
+            </a:pPr>
+            <a:r>
+              <a:t>Before ANY write-tool execution, the agent evaluates policy.</a:t>
+            </a:r>
+          </a:p>
+          <a:p>
+            <a:pPr>
+              <a:spcBef>
+                <a:spcPts val="1600"/>
+              </a:spcBef>
+              <a:defRPr sz="1600" b="1">
+                <a:solidFill>
+                  <a:srgbClr val="FFFFFF"/>
+                </a:solidFill>
+              </a:defRPr>
+            </a:pPr>
+            <a:r>
+              <a:t>Step 1: Hard Stop &amp; Deny</a:t>
+            </a:r>
+          </a:p>
+          <a:p>
+            <a:pPr lvl="1">
+              <a:defRPr sz="1400">
+                <a:solidFill>
+                  <a:srgbClr val="F8FAFC"/>
+                </a:solidFill>
+              </a:defRPr>
+            </a:pPr>
+            <a:r>
+              <a:t>Agent halts entirely. Outputs a prominent ⚠️ Policy Non-Compliance Warning. It is explicitly forbidden from secretly downgrading parameters.</a:t>
+            </a:r>
+          </a:p>
+          <a:p>
+            <a:pPr>
+              <a:spcBef>
+                <a:spcPts val="1600"/>
+              </a:spcBef>
+              <a:defRPr sz="1600" b="1">
+                <a:solidFill>
+                  <a:srgbClr val="FFFFFF"/>
+                </a:solidFill>
+              </a:defRPr>
+            </a:pPr>
+            <a:r>
+              <a:t>Step 2: Multi-Part Query Defense</a:t>
+            </a:r>
+          </a:p>
+          <a:p>
+            <a:pPr lvl="1">
+              <a:defRPr sz="1400">
+                <a:solidFill>
+                  <a:srgbClr val="F8FAFC"/>
+                </a:solidFill>
+              </a:defRPr>
+            </a:pPr>
+            <a:r>
+              <a:t>Agent is forced to answer all secondary questions (e.g. $500 equipment allowances) in the same denial response.</a:t>
+            </a:r>
+          </a:p>
+          <a:p>
+            <a:pPr>
+              <a:spcBef>
+                <a:spcPts val="1600"/>
+              </a:spcBef>
+              <a:defRPr sz="1600" b="1">
+                <a:solidFill>
+                  <a:srgbClr val="FFFFFF"/>
+                </a:solidFill>
+              </a:defRPr>
+            </a:pPr>
+            <a:r>
+              <a:t>Step 3: Explicit Escalation</a:t>
+            </a:r>
+          </a:p>
+          <a:p>
+            <a:pPr lvl="1">
+              <a:defRPr sz="1400">
+                <a:solidFill>
+                  <a:srgbClr val="F8FAFC"/>
+                </a:solidFill>
+              </a:defRPr>
+            </a:pPr>
+            <a:r>
+              <a:t>Agent only verbally suggests escalation. It NEVER executes 'escalate_to_human_hr' unless the user replies back in the next turn confirming it.</a:t>
+            </a:r>
+          </a:p>
+        </p:txBody>
+      </p:sp>
+    </p:spTree>
+  </p:cSld>
+  <p:clrMapOvr>
+    <a:masterClrMapping/>
+  </p:clrMapOvr>
+</p:sld>
+</file>
+
+<file path=ppt/slides/slide3.xml><?xml version="1.0" encoding="utf-8"?>
+<p:sld xmlns:a="http://schemas.openxmlformats.org/drawingml/2006/main" xmlns:p="http://schemas.openxmlformats.org/presentationml/2006/main" xmlns:r="http://schemas.openxmlformats.org/officeDocument/2006/relationships">
+  <p:cSld>
+    <p:bg>
+      <p:bgPr>
+        <a:solidFill>
+          <a:srgbClr val="0F172A"/>
+        </a:solidFill>
+        <a:effectLst/>
+      </p:bgPr>
+    </p:bg>
+    <p:spTree>
+      <p:nvGrpSpPr>
+        <p:cNvPr id="1" name=""/>
+        <p:cNvGrpSpPr/>
+        <p:nvPr/>
+      </p:nvGrpSpPr>
+      <p:grpSpPr/>
+      <p:sp>
+        <p:nvSpPr>
+          <p:cNvPr id="2" name="Rectangle 1"/>
           <p:cNvSpPr/>
           <p:nvPr/>
         </p:nvSpPr>
         <p:spPr>
           <a:xfrm>
-            <a:off x="731520" y="1463040"/>
-            <a:ext cx="3328416" cy="4754880"/>
-          </a:xfrm>
-          <a:prstGeom prst="roundRect">
+            <a:off x="731520" y="1371600"/>
+            <a:ext cx="137160" cy="4114800"/>
+          </a:xfrm>
+          <a:prstGeom prst="rect">
             <a:avLst/>
           </a:prstGeom>
           <a:solidFill>
-            <a:srgbClr val="FFFFFF"/>
+            <a:srgbClr val="1A73E8"/>
           </a:solidFill>
-          <a:ln w="19050">
-            <a:solidFill>
-              <a:srgbClr val="E2E8F0"/>
-            </a:solidFill>
+          <a:ln>
+            <a:noFill/>
           </a:ln>
         </p:spPr>
         <p:style>
@@ -4076,14 +5327,14 @@
       </p:sp>
       <p:sp>
         <p:nvSpPr>
-          <p:cNvPr id="4" name="TextBox 3"/>
+          <p:cNvPr id="3" name="TextBox 2"/>
           <p:cNvSpPr txBox="1"/>
           <p:nvPr/>
         </p:nvSpPr>
         <p:spPr>
           <a:xfrm>
-            <a:off x="960120" y="1645920"/>
-            <a:ext cx="2871216" cy="4389120"/>
+            <a:off x="1097280" y="1371600"/>
+            <a:ext cx="10241280" cy="4114800"/>
           </a:xfrm>
           <a:prstGeom prst="rect">
             <a:avLst/>
@@ -4098,801 +5349,70 @@
           <a:p>
             <a:pPr>
               <a:spcAft>
-                <a:spcPts val="1400"/>
-              </a:spcAft>
-              <a:defRPr sz="1700" b="1">
-                <a:solidFill>
-                  <a:srgbClr val="EA4335"/>
-                </a:solidFill>
-              </a:defRPr>
-            </a:pPr>
-            <a:r>
-              <a:t>The Enterprise Challenge</a:t>
-            </a:r>
-          </a:p>
-          <a:p>
-            <a:pPr>
-              <a:spcAft>
-                <a:spcPts val="1000"/>
-              </a:spcAft>
-              <a:defRPr sz="1200">
-                <a:solidFill>
-                  <a:srgbClr val="1E293B"/>
-                </a:solidFill>
-              </a:defRPr>
-            </a:pPr>
-            <a:r>
-              <a:t>• Fragmented Silos: Employees navigate separate portals for Policies (PDFs), HCM (Workday/WorkWeek), and ITSM (ServiceNow/ServiceImmediately).</a:t>
-            </a:r>
-          </a:p>
-          <a:p>
-            <a:pPr>
-              <a:spcAft>
-                <a:spcPts val="1000"/>
-              </a:spcAft>
-              <a:defRPr sz="1200">
-                <a:solidFill>
-                  <a:srgbClr val="1E293B"/>
-                </a:solidFill>
-              </a:defRPr>
-            </a:pPr>
-            <a:r>
-              <a:t>• Context Loss: Compound workflows (e.g. sick leave -&gt; PTO booking -&gt; email delegation ticket) require 3 manual hops.</a:t>
-            </a:r>
-          </a:p>
-          <a:p>
-            <a:pPr>
-              <a:spcAft>
-                <a:spcPts val="1000"/>
-              </a:spcAft>
-              <a:defRPr sz="1200">
-                <a:solidFill>
-                  <a:srgbClr val="1E293B"/>
-                </a:solidFill>
-              </a:defRPr>
-            </a:pPr>
-            <a:r>
-              <a:t>• Compliance Vulnerabilities: Employees misclassify expenses or take unapproved leaves due to complex statutory policies.</a:t>
-            </a:r>
-          </a:p>
-        </p:txBody>
-      </p:sp>
-      <p:sp>
-        <p:nvSpPr>
-          <p:cNvPr id="5" name="Rounded Rectangle 4"/>
-          <p:cNvSpPr/>
-          <p:nvPr/>
-        </p:nvSpPr>
-        <p:spPr>
-          <a:xfrm>
-            <a:off x="4343400" y="1463040"/>
-            <a:ext cx="3328416" cy="4754880"/>
-          </a:xfrm>
-          <a:prstGeom prst="roundRect">
-            <a:avLst/>
-          </a:prstGeom>
-          <a:solidFill>
-            <a:srgbClr val="FFFFFF"/>
-          </a:solidFill>
-          <a:ln w="19050">
-            <a:solidFill>
-              <a:srgbClr val="E2E8F0"/>
-            </a:solidFill>
-          </a:ln>
-        </p:spPr>
-        <p:style>
-          <a:lnRef idx="1">
-            <a:schemeClr val="accent1"/>
-          </a:lnRef>
-          <a:fillRef idx="3">
-            <a:schemeClr val="accent1"/>
-          </a:fillRef>
-          <a:effectRef idx="2">
-            <a:schemeClr val="accent1"/>
-          </a:effectRef>
-          <a:fontRef idx="minor">
-            <a:schemeClr val="lt1"/>
-          </a:fontRef>
-        </p:style>
-        <p:txBody>
-          <a:bodyPr rtlCol="0" anchor="ctr"/>
-          <a:lstStyle/>
-          <a:p>
-            <a:pPr algn="ctr"/>
-          </a:p>
-        </p:txBody>
-      </p:sp>
-      <p:sp>
-        <p:nvSpPr>
-          <p:cNvPr id="6" name="TextBox 5"/>
-          <p:cNvSpPr txBox="1"/>
-          <p:nvPr/>
-        </p:nvSpPr>
-        <p:spPr>
-          <a:xfrm>
-            <a:off x="4572000" y="1645920"/>
-            <a:ext cx="2871216" cy="4389120"/>
-          </a:xfrm>
-          <a:prstGeom prst="rect">
-            <a:avLst/>
-          </a:prstGeom>
-          <a:noFill/>
-        </p:spPr>
-        <p:txBody>
-          <a:bodyPr wrap="square">
-            <a:spAutoFit/>
-          </a:bodyPr>
-          <a:lstStyle/>
-          <a:p>
-            <a:pPr>
-              <a:spcAft>
-                <a:spcPts val="1400"/>
-              </a:spcAft>
-              <a:defRPr sz="1700" b="1">
+                <a:spcPts val="1200"/>
+              </a:spcAft>
+              <a:defRPr sz="1300" b="1">
+                <a:solidFill>
+                  <a:srgbClr val="FBBC05"/>
+                </a:solidFill>
+              </a:defRPr>
+            </a:pPr>
+            <a:r>
+              <a:t>GOOGLE ENTERPRISE AI HACKATHON • TEAM 12</a:t>
+            </a:r>
+          </a:p>
+          <a:p>
+            <a:pPr>
+              <a:defRPr sz="4400" b="1">
+                <a:solidFill>
+                  <a:srgbClr val="FFFFFF"/>
+                </a:solidFill>
+              </a:defRPr>
+            </a:pPr>
+            <a:r>
+              <a:t>Elevate HR</a:t>
+            </a:r>
+          </a:p>
+          <a:p>
+            <a:pPr>
+              <a:spcAft>
+                <a:spcPts val="1800"/>
+              </a:spcAft>
+              <a:defRPr sz="2800" b="1">
                 <a:solidFill>
                   <a:srgbClr val="1A73E8"/>
                 </a:solidFill>
               </a:defRPr>
             </a:pPr>
             <a:r>
-              <a:t>The Agentic Solution</a:t>
-            </a:r>
-          </a:p>
-          <a:p>
-            <a:pPr>
-              <a:spcAft>
-                <a:spcPts val="1000"/>
-              </a:spcAft>
-              <a:defRPr sz="1200">
-                <a:solidFill>
-                  <a:srgbClr val="1E293B"/>
-                </a:solidFill>
-              </a:defRPr>
-            </a:pPr>
-            <a:r>
-              <a:t>• Hierarchical Multi-Agent Topology: Built on Google Agent Development Kit (ADK) with root orchestrator &amp; 3 domain specialists.</a:t>
-            </a:r>
-          </a:p>
-          <a:p>
-            <a:pPr>
-              <a:spcAft>
-                <a:spcPts val="1000"/>
-              </a:spcAft>
-              <a:defRPr sz="1200">
-                <a:solidFill>
-                  <a:srgbClr val="1E293B"/>
-                </a:solidFill>
-              </a:defRPr>
-            </a:pPr>
-            <a:r>
-              <a:t>• Open Knowledge Federation (OKF): Sub-millisecond policy retrieval with strict URI citations &amp; zero-hallucination guarantees.</a:t>
-            </a:r>
-          </a:p>
-          <a:p>
-            <a:pPr>
-              <a:spcAft>
-                <a:spcPts val="1000"/>
-              </a:spcAft>
-              <a:defRPr sz="1200">
-                <a:solidFill>
-                  <a:srgbClr val="1E293B"/>
-                </a:solidFill>
-              </a:defRPr>
-            </a:pPr>
-            <a:r>
-              <a:t>• FastMCP Integration: Model Context Protocol over Streamable HTTP for live bi-directional HCM and ITSM transactions.</a:t>
-            </a:r>
-          </a:p>
-        </p:txBody>
-      </p:sp>
-      <p:sp>
-        <p:nvSpPr>
-          <p:cNvPr id="7" name="Rounded Rectangle 6"/>
-          <p:cNvSpPr/>
-          <p:nvPr/>
-        </p:nvSpPr>
-        <p:spPr>
-          <a:xfrm>
-            <a:off x="7955280" y="1463040"/>
-            <a:ext cx="3328416" cy="4754880"/>
-          </a:xfrm>
-          <a:prstGeom prst="roundRect">
-            <a:avLst/>
-          </a:prstGeom>
-          <a:solidFill>
-            <a:srgbClr val="FFFFFF"/>
-          </a:solidFill>
-          <a:ln w="19050">
-            <a:solidFill>
-              <a:srgbClr val="E2E8F0"/>
-            </a:solidFill>
-          </a:ln>
-        </p:spPr>
-        <p:style>
-          <a:lnRef idx="1">
-            <a:schemeClr val="accent1"/>
-          </a:lnRef>
-          <a:fillRef idx="3">
-            <a:schemeClr val="accent1"/>
-          </a:fillRef>
-          <a:effectRef idx="2">
-            <a:schemeClr val="accent1"/>
-          </a:effectRef>
-          <a:fontRef idx="minor">
-            <a:schemeClr val="lt1"/>
-          </a:fontRef>
-        </p:style>
-        <p:txBody>
-          <a:bodyPr rtlCol="0" anchor="ctr"/>
-          <a:lstStyle/>
-          <a:p>
-            <a:pPr algn="ctr"/>
-          </a:p>
-        </p:txBody>
-      </p:sp>
-      <p:sp>
-        <p:nvSpPr>
-          <p:cNvPr id="8" name="TextBox 7"/>
-          <p:cNvSpPr txBox="1"/>
-          <p:nvPr/>
-        </p:nvSpPr>
-        <p:spPr>
-          <a:xfrm>
-            <a:off x="8183880" y="1645920"/>
-            <a:ext cx="2871216" cy="4389120"/>
-          </a:xfrm>
-          <a:prstGeom prst="rect">
-            <a:avLst/>
-          </a:prstGeom>
-          <a:noFill/>
-        </p:spPr>
-        <p:txBody>
-          <a:bodyPr wrap="square">
-            <a:spAutoFit/>
-          </a:bodyPr>
-          <a:lstStyle/>
-          <a:p>
-            <a:pPr>
-              <a:spcAft>
-                <a:spcPts val="1400"/>
-              </a:spcAft>
-              <a:defRPr sz="1700" b="1">
+              <a:t>Autonomous Multi-Agent HR Orchestrator</a:t>
+            </a:r>
+          </a:p>
+          <a:p>
+            <a:pPr>
+              <a:spcAft>
+                <a:spcPts val="2400"/>
+              </a:spcAft>
+              <a:defRPr sz="1600">
+                <a:solidFill>
+                  <a:srgbClr val="CBD5E1"/>
+                </a:solidFill>
+              </a:defRPr>
+            </a:pPr>
+            <a:r>
+              <a:t>Next-Generation Enterprise Self-Service powered by Google ADK, FastMCP, Model Armor &amp; Open Knowledge Federation.</a:t>
+            </a:r>
+          </a:p>
+          <a:p>
+            <a:pPr>
+              <a:defRPr sz="1300" b="1">
                 <a:solidFill>
                   <a:srgbClr val="34A853"/>
                 </a:solidFill>
               </a:defRPr>
             </a:pPr>
             <a:r>
-              <a:t>Measurable Impact</a:t>
-            </a:r>
-          </a:p>
-          <a:p>
-            <a:pPr>
-              <a:spcAft>
-                <a:spcPts val="1000"/>
-              </a:spcAft>
-              <a:defRPr sz="1200">
-                <a:solidFill>
-                  <a:srgbClr val="1E293B"/>
-                </a:solidFill>
-              </a:defRPr>
-            </a:pPr>
-            <a:r>
-              <a:t>• 85%+ Deflection of routine Tier-1 HR and IT helpdesk queries.</a:t>
-            </a:r>
-          </a:p>
-          <a:p>
-            <a:pPr>
-              <a:spcAft>
-                <a:spcPts val="1000"/>
-              </a:spcAft>
-              <a:defRPr sz="1200">
-                <a:solidFill>
-                  <a:srgbClr val="1E293B"/>
-                </a:solidFill>
-              </a:defRPr>
-            </a:pPr>
-            <a:r>
-              <a:t>• &lt;10s SLA across multi-turn compound cross-system workflows.</a:t>
-            </a:r>
-          </a:p>
-          <a:p>
-            <a:pPr>
-              <a:spcAft>
-                <a:spcPts val="1000"/>
-              </a:spcAft>
-              <a:defRPr sz="1200">
-                <a:solidFill>
-                  <a:srgbClr val="1E293B"/>
-                </a:solidFill>
-              </a:defRPr>
-            </a:pPr>
-            <a:r>
-              <a:t>• 100% Policy Compliance with hard programmatic and prompt invariants ('No means No').</a:t>
-            </a:r>
-          </a:p>
-          <a:p>
-            <a:pPr>
-              <a:spcAft>
-                <a:spcPts val="1000"/>
-              </a:spcAft>
-              <a:defRPr sz="1200">
-                <a:solidFill>
-                  <a:srgbClr val="1E293B"/>
-                </a:solidFill>
-              </a:defRPr>
-            </a:pPr>
-            <a:r>
-              <a:t>• 99.34% Score on comprehensive 33-case benchmark evaluation suite.</a:t>
-            </a:r>
-          </a:p>
-        </p:txBody>
-      </p:sp>
-    </p:spTree>
-  </p:cSld>
-  <p:clrMapOvr>
-    <a:masterClrMapping/>
-  </p:clrMapOvr>
-</p:sld>
-</file>
-
-<file path=ppt/slides/slide3.xml><?xml version="1.0" encoding="utf-8"?>
-<p:sld xmlns:a="http://schemas.openxmlformats.org/drawingml/2006/main" xmlns:p="http://schemas.openxmlformats.org/presentationml/2006/main" xmlns:r="http://schemas.openxmlformats.org/officeDocument/2006/relationships">
-  <p:cSld>
-    <p:bg>
-      <p:bgPr>
-        <a:solidFill>
-          <a:srgbClr val="F8FAFC"/>
-        </a:solidFill>
-        <a:effectLst/>
-      </p:bgPr>
-    </p:bg>
-    <p:spTree>
-      <p:nvGrpSpPr>
-        <p:cNvPr id="1" name=""/>
-        <p:cNvGrpSpPr/>
-        <p:nvPr/>
-      </p:nvGrpSpPr>
-      <p:grpSpPr/>
-      <p:sp>
-        <p:nvSpPr>
-          <p:cNvPr id="2" name="TextBox 1"/>
-          <p:cNvSpPr txBox="1"/>
-          <p:nvPr/>
-        </p:nvSpPr>
-        <p:spPr>
-          <a:xfrm>
-            <a:off x="731520" y="365760"/>
-            <a:ext cx="10698480" cy="1005840"/>
-          </a:xfrm>
-          <a:prstGeom prst="rect">
-            <a:avLst/>
-          </a:prstGeom>
-          <a:noFill/>
-        </p:spPr>
-        <p:txBody>
-          <a:bodyPr wrap="square" lIns="0" tIns="0" rIns="0" bIns="0">
-            <a:spAutoFit/>
-          </a:bodyPr>
-          <a:lstStyle/>
-          <a:p>
-            <a:pPr>
-              <a:spcAft>
-                <a:spcPts val="200"/>
-              </a:spcAft>
-              <a:defRPr sz="1100" b="1">
-                <a:solidFill>
-                  <a:srgbClr val="1A73E8"/>
-                </a:solidFill>
-              </a:defRPr>
-            </a:pPr>
-            <a:r>
-              <a:t>ARCHITECTURE TOPOLOGY</a:t>
-            </a:r>
-          </a:p>
-          <a:p>
-            <a:pPr>
-              <a:defRPr sz="2200" b="1">
-                <a:solidFill>
-                  <a:srgbClr val="1E293B"/>
-                </a:solidFill>
-              </a:defRPr>
-            </a:pPr>
-            <a:r>
-              <a:t>Decoupled Hierarchical Multi-Agent Architecture</a:t>
-            </a:r>
-          </a:p>
-        </p:txBody>
-      </p:sp>
-      <p:pic>
-        <p:nvPicPr>
-          <p:cNvPr id="3" name="Picture 2" descr="system_architecture_1786964663566.jpg"/>
-          <p:cNvPicPr>
-            <a:picLocks noChangeAspect="1"/>
-          </p:cNvPicPr>
-          <p:nvPr/>
-        </p:nvPicPr>
-        <p:blipFill>
-          <a:blip r:embed="rId2"/>
-          <a:stretch>
-            <a:fillRect/>
-          </a:stretch>
-        </p:blipFill>
-        <p:spPr>
-          <a:xfrm>
-            <a:off x="731520" y="1463040"/>
-            <a:ext cx="5669280" cy="3164249"/>
-          </a:xfrm>
-          <a:prstGeom prst="rect">
-            <a:avLst/>
-          </a:prstGeom>
-        </p:spPr>
-      </p:pic>
-      <p:sp>
-        <p:nvSpPr>
-          <p:cNvPr id="4" name="Rounded Rectangle 3"/>
-          <p:cNvSpPr/>
-          <p:nvPr/>
-        </p:nvSpPr>
-        <p:spPr>
-          <a:xfrm>
-            <a:off x="6675120" y="1463040"/>
-            <a:ext cx="4754880" cy="1508760"/>
-          </a:xfrm>
-          <a:prstGeom prst="roundRect">
-            <a:avLst/>
-          </a:prstGeom>
-          <a:solidFill>
-            <a:srgbClr val="FFFFFF"/>
-          </a:solidFill>
-          <a:ln w="19050">
-            <a:solidFill>
-              <a:srgbClr val="E2E8F0"/>
-            </a:solidFill>
-          </a:ln>
-        </p:spPr>
-        <p:style>
-          <a:lnRef idx="1">
-            <a:schemeClr val="accent1"/>
-          </a:lnRef>
-          <a:fillRef idx="3">
-            <a:schemeClr val="accent1"/>
-          </a:fillRef>
-          <a:effectRef idx="2">
-            <a:schemeClr val="accent1"/>
-          </a:effectRef>
-          <a:fontRef idx="minor">
-            <a:schemeClr val="lt1"/>
-          </a:fontRef>
-        </p:style>
-        <p:txBody>
-          <a:bodyPr rtlCol="0" anchor="ctr"/>
-          <a:lstStyle/>
-          <a:p>
-            <a:pPr algn="ctr"/>
-          </a:p>
-        </p:txBody>
-      </p:sp>
-      <p:sp>
-        <p:nvSpPr>
-          <p:cNvPr id="5" name="TextBox 4"/>
-          <p:cNvSpPr txBox="1"/>
-          <p:nvPr/>
-        </p:nvSpPr>
-        <p:spPr>
-          <a:xfrm>
-            <a:off x="6858000" y="1554480"/>
-            <a:ext cx="4389120" cy="1325880"/>
-          </a:xfrm>
-          <a:prstGeom prst="rect">
-            <a:avLst/>
-          </a:prstGeom>
-          <a:noFill/>
-        </p:spPr>
-        <p:txBody>
-          <a:bodyPr wrap="square">
-            <a:spAutoFit/>
-          </a:bodyPr>
-          <a:lstStyle/>
-          <a:p>
-            <a:pPr>
-              <a:spcAft>
-                <a:spcPts val="400"/>
-              </a:spcAft>
-              <a:defRPr sz="1300" b="1">
-                <a:solidFill>
-                  <a:srgbClr val="1A73E8"/>
-                </a:solidFill>
-              </a:defRPr>
-            </a:pPr>
-            <a:r>
-              <a:t>Central ADK Root Orchestrator (`hr_orchestrator`)</a:t>
-            </a:r>
-          </a:p>
-          <a:p>
-            <a:pPr>
-              <a:spcAft>
-                <a:spcPts val="200"/>
-              </a:spcAft>
-              <a:defRPr sz="1050">
-                <a:solidFill>
-                  <a:srgbClr val="1E293B"/>
-                </a:solidFill>
-              </a:defRPr>
-            </a:pPr>
-            <a:r>
-              <a:t>• Acts as the intelligent coordinator and single conversational interface.</a:t>
-            </a:r>
-          </a:p>
-          <a:p>
-            <a:pPr>
-              <a:spcAft>
-                <a:spcPts val="200"/>
-              </a:spcAft>
-              <a:defRPr sz="1050">
-                <a:solidFill>
-                  <a:srgbClr val="1E293B"/>
-                </a:solidFill>
-              </a:defRPr>
-            </a:pPr>
-            <a:r>
-              <a:t>• Performs intent classification, context aggregation, and dynamic delegation.</a:t>
-            </a:r>
-          </a:p>
-          <a:p>
-            <a:pPr>
-              <a:spcAft>
-                <a:spcPts val="200"/>
-              </a:spcAft>
-              <a:defRPr sz="1050">
-                <a:solidFill>
-                  <a:srgbClr val="1E293B"/>
-                </a:solidFill>
-              </a:defRPr>
-            </a:pPr>
-            <a:r>
-              <a:t>• Synthesizes multi-agent outputs into unified executive responses.</a:t>
-            </a:r>
-          </a:p>
-        </p:txBody>
-      </p:sp>
-      <p:sp>
-        <p:nvSpPr>
-          <p:cNvPr id="6" name="Rounded Rectangle 5"/>
-          <p:cNvSpPr/>
-          <p:nvPr/>
-        </p:nvSpPr>
-        <p:spPr>
-          <a:xfrm>
-            <a:off x="6675120" y="3108960"/>
-            <a:ext cx="4754880" cy="1508760"/>
-          </a:xfrm>
-          <a:prstGeom prst="roundRect">
-            <a:avLst/>
-          </a:prstGeom>
-          <a:solidFill>
-            <a:srgbClr val="FFFFFF"/>
-          </a:solidFill>
-          <a:ln w="19050">
-            <a:solidFill>
-              <a:srgbClr val="E2E8F0"/>
-            </a:solidFill>
-          </a:ln>
-        </p:spPr>
-        <p:style>
-          <a:lnRef idx="1">
-            <a:schemeClr val="accent1"/>
-          </a:lnRef>
-          <a:fillRef idx="3">
-            <a:schemeClr val="accent1"/>
-          </a:fillRef>
-          <a:effectRef idx="2">
-            <a:schemeClr val="accent1"/>
-          </a:effectRef>
-          <a:fontRef idx="minor">
-            <a:schemeClr val="lt1"/>
-          </a:fontRef>
-        </p:style>
-        <p:txBody>
-          <a:bodyPr rtlCol="0" anchor="ctr"/>
-          <a:lstStyle/>
-          <a:p>
-            <a:pPr algn="ctr"/>
-          </a:p>
-        </p:txBody>
-      </p:sp>
-      <p:sp>
-        <p:nvSpPr>
-          <p:cNvPr id="7" name="TextBox 6"/>
-          <p:cNvSpPr txBox="1"/>
-          <p:nvPr/>
-        </p:nvSpPr>
-        <p:spPr>
-          <a:xfrm>
-            <a:off x="6858000" y="3200400"/>
-            <a:ext cx="4389120" cy="1325880"/>
-          </a:xfrm>
-          <a:prstGeom prst="rect">
-            <a:avLst/>
-          </a:prstGeom>
-          <a:noFill/>
-        </p:spPr>
-        <p:txBody>
-          <a:bodyPr wrap="square">
-            <a:spAutoFit/>
-          </a:bodyPr>
-          <a:lstStyle/>
-          <a:p>
-            <a:pPr>
-              <a:spcAft>
-                <a:spcPts val="400"/>
-              </a:spcAft>
-              <a:defRPr sz="1300" b="1">
-                <a:solidFill>
-                  <a:srgbClr val="1A73E8"/>
-                </a:solidFill>
-              </a:defRPr>
-            </a:pPr>
-            <a:r>
-              <a:t>Policy Specialist (`policy_specialist`)</a:t>
-            </a:r>
-          </a:p>
-          <a:p>
-            <a:pPr>
-              <a:spcAft>
-                <a:spcPts val="200"/>
-              </a:spcAft>
-              <a:defRPr sz="1050">
-                <a:solidFill>
-                  <a:srgbClr val="1E293B"/>
-                </a:solidFill>
-              </a:defRPr>
-            </a:pPr>
-            <a:r>
-              <a:t>• Open Knowledge Format (OKF) with thread-safe atomic cache hot-reloading.</a:t>
-            </a:r>
-          </a:p>
-          <a:p>
-            <a:pPr>
-              <a:spcAft>
-                <a:spcPts val="200"/>
-              </a:spcAft>
-              <a:defRPr sz="1050">
-                <a:solidFill>
-                  <a:srgbClr val="1E293B"/>
-                </a:solidFill>
-              </a:defRPr>
-            </a:pPr>
-            <a:r>
-              <a:t>• Extracts statutory Singapore MOM rules, leaves, benefits, and code of conduct.</a:t>
-            </a:r>
-          </a:p>
-          <a:p>
-            <a:pPr>
-              <a:spcAft>
-                <a:spcPts val="200"/>
-              </a:spcAft>
-              <a:defRPr sz="1050">
-                <a:solidFill>
-                  <a:srgbClr val="1E293B"/>
-                </a:solidFill>
-              </a:defRPr>
-            </a:pPr>
-            <a:r>
-              <a:t>• Enforces strict URI citations (`policy://...`) and zero hallucination.</a:t>
-            </a:r>
-          </a:p>
-        </p:txBody>
-      </p:sp>
-      <p:sp>
-        <p:nvSpPr>
-          <p:cNvPr id="8" name="Rounded Rectangle 7"/>
-          <p:cNvSpPr/>
-          <p:nvPr/>
-        </p:nvSpPr>
-        <p:spPr>
-          <a:xfrm>
-            <a:off x="6675120" y="4754880"/>
-            <a:ext cx="4754880" cy="1508760"/>
-          </a:xfrm>
-          <a:prstGeom prst="roundRect">
-            <a:avLst/>
-          </a:prstGeom>
-          <a:solidFill>
-            <a:srgbClr val="FFFFFF"/>
-          </a:solidFill>
-          <a:ln w="19050">
-            <a:solidFill>
-              <a:srgbClr val="E2E8F0"/>
-            </a:solidFill>
-          </a:ln>
-        </p:spPr>
-        <p:style>
-          <a:lnRef idx="1">
-            <a:schemeClr val="accent1"/>
-          </a:lnRef>
-          <a:fillRef idx="3">
-            <a:schemeClr val="accent1"/>
-          </a:fillRef>
-          <a:effectRef idx="2">
-            <a:schemeClr val="accent1"/>
-          </a:effectRef>
-          <a:fontRef idx="minor">
-            <a:schemeClr val="lt1"/>
-          </a:fontRef>
-        </p:style>
-        <p:txBody>
-          <a:bodyPr rtlCol="0" anchor="ctr"/>
-          <a:lstStyle/>
-          <a:p>
-            <a:pPr algn="ctr"/>
-          </a:p>
-        </p:txBody>
-      </p:sp>
-      <p:sp>
-        <p:nvSpPr>
-          <p:cNvPr id="9" name="TextBox 8"/>
-          <p:cNvSpPr txBox="1"/>
-          <p:nvPr/>
-        </p:nvSpPr>
-        <p:spPr>
-          <a:xfrm>
-            <a:off x="6858000" y="4846320"/>
-            <a:ext cx="4389120" cy="1325880"/>
-          </a:xfrm>
-          <a:prstGeom prst="rect">
-            <a:avLst/>
-          </a:prstGeom>
-          <a:noFill/>
-        </p:spPr>
-        <p:txBody>
-          <a:bodyPr wrap="square">
-            <a:spAutoFit/>
-          </a:bodyPr>
-          <a:lstStyle/>
-          <a:p>
-            <a:pPr>
-              <a:spcAft>
-                <a:spcPts val="400"/>
-              </a:spcAft>
-              <a:defRPr sz="1300" b="1">
-                <a:solidFill>
-                  <a:srgbClr val="1A73E8"/>
-                </a:solidFill>
-              </a:defRPr>
-            </a:pPr>
-            <a:r>
-              <a:t>HCM Specialist (`hcm_specialist`) &amp; ITSM Specialist (`itsm_specialist`)</a:t>
-            </a:r>
-          </a:p>
-          <a:p>
-            <a:pPr>
-              <a:spcAft>
-                <a:spcPts val="200"/>
-              </a:spcAft>
-              <a:defRPr sz="1050">
-                <a:solidFill>
-                  <a:srgbClr val="1E293B"/>
-                </a:solidFill>
-              </a:defRPr>
-            </a:pPr>
-            <a:r>
-              <a:t>• WorkWeek FastMCP: Checks balances, submits time-off, updates profiles.</a:t>
-            </a:r>
-          </a:p>
-          <a:p>
-            <a:pPr>
-              <a:spcAft>
-                <a:spcPts val="200"/>
-              </a:spcAft>
-              <a:defRPr sz="1050">
-                <a:solidFill>
-                  <a:srgbClr val="1E293B"/>
-                </a:solidFill>
-              </a:defRPr>
-            </a:pPr>
-            <a:r>
-              <a:t>• ServiceImmediately FastMCP: Ticket creation, comment activity, Tier-2 HITL escalation.</a:t>
+              <a:t>Architectural Blueprint • Decision Choices • Security Guardrails • Live System Verification</a:t>
             </a:r>
           </a:p>
         </p:txBody>
@@ -4956,7 +5476,7 @@
               </a:defRPr>
             </a:pPr>
             <a:r>
-              <a:t>ENGINEERING RATIONALE</a:t>
+              <a:t>EXECUTIVE OVERVIEW</a:t>
             </a:r>
           </a:p>
           <a:p>
@@ -4968,7 +5488,7 @@
               </a:defRPr>
             </a:pPr>
             <a:r>
-              <a:t>Key Architectural Decisions: Why This and Not That?</a:t>
+              <a:t>Transforming Enterprise HR Friction into Autonomous Resolution</a:t>
             </a:r>
           </a:p>
         </p:txBody>
@@ -4982,7 +5502,7 @@
         <p:spPr>
           <a:xfrm>
             <a:off x="731520" y="1463040"/>
-            <a:ext cx="5120640" cy="2331720"/>
+            <a:ext cx="3328416" cy="4754880"/>
           </a:xfrm>
           <a:prstGeom prst="roundRect">
             <a:avLst/>
@@ -5026,8 +5546,8 @@
         </p:nvSpPr>
         <p:spPr>
           <a:xfrm>
-            <a:off x="914400" y="1600200"/>
-            <a:ext cx="4754880" cy="2057400"/>
+            <a:off x="960120" y="1645920"/>
+            <a:ext cx="2871216" cy="4389120"/>
           </a:xfrm>
           <a:prstGeom prst="rect">
             <a:avLst/>
@@ -5042,73 +5562,61 @@
           <a:p>
             <a:pPr>
               <a:spcAft>
-                <a:spcPts val="300"/>
-              </a:spcAft>
-              <a:defRPr sz="1050" b="1">
-                <a:solidFill>
-                  <a:srgbClr val="1A73E8"/>
-                </a:solidFill>
-              </a:defRPr>
-            </a:pPr>
-            <a:r>
-              <a:t>ARCHITECTURE DECISION</a:t>
-            </a:r>
-          </a:p>
-          <a:p>
-            <a:pPr>
-              <a:defRPr sz="1250" b="1">
-                <a:solidFill>
-                  <a:srgbClr val="34A853"/>
-                </a:solidFill>
-              </a:defRPr>
-            </a:pPr>
-            <a:r>
-              <a:t>✅ Chosen: Google ADK Multi-Agent Hierarchy</a:t>
-            </a:r>
-          </a:p>
-          <a:p>
-            <a:pPr>
-              <a:spcAft>
-                <a:spcPts val="600"/>
-              </a:spcAft>
-              <a:defRPr sz="1100">
-                <a:solidFill>
-                  <a:srgbClr val="64748B"/>
-                </a:solidFill>
-              </a:defRPr>
-            </a:pPr>
-            <a:r>
-              <a:t>❌ Rejected: Monolithic Prompt / Flat LangChain</a:t>
-            </a:r>
-          </a:p>
-          <a:p>
-            <a:pPr>
-              <a:spcAft>
-                <a:spcPts val="200"/>
-              </a:spcAft>
-              <a:defRPr sz="1000">
-                <a:solidFill>
-                  <a:srgbClr val="1E293B"/>
-                </a:solidFill>
-              </a:defRPr>
-            </a:pPr>
-            <a:r>
-              <a:t>• Domain tool isolation prevents tool hallucination and prompt pollution.</a:t>
-            </a:r>
-          </a:p>
-          <a:p>
-            <a:pPr>
-              <a:spcAft>
-                <a:spcPts val="200"/>
-              </a:spcAft>
-              <a:defRPr sz="1000">
-                <a:solidFill>
-                  <a:srgbClr val="1E293B"/>
-                </a:solidFill>
-              </a:defRPr>
-            </a:pPr>
-            <a:r>
-              <a:t>• Lightweight ADK Runner with standard SessionService for robust state management.</a:t>
+                <a:spcPts val="1400"/>
+              </a:spcAft>
+              <a:defRPr sz="1700" b="1">
+                <a:solidFill>
+                  <a:srgbClr val="EA4335"/>
+                </a:solidFill>
+              </a:defRPr>
+            </a:pPr>
+            <a:r>
+              <a:t>The Enterprise Challenge</a:t>
+            </a:r>
+          </a:p>
+          <a:p>
+            <a:pPr>
+              <a:spcAft>
+                <a:spcPts val="1000"/>
+              </a:spcAft>
+              <a:defRPr sz="1200">
+                <a:solidFill>
+                  <a:srgbClr val="1E293B"/>
+                </a:solidFill>
+              </a:defRPr>
+            </a:pPr>
+            <a:r>
+              <a:t>• Fragmented Silos: Employees navigate separate portals for Policies (PDFs), HCM (Workday/WorkWeek), and ITSM (ServiceNow/ServiceImmediately).</a:t>
+            </a:r>
+          </a:p>
+          <a:p>
+            <a:pPr>
+              <a:spcAft>
+                <a:spcPts val="1000"/>
+              </a:spcAft>
+              <a:defRPr sz="1200">
+                <a:solidFill>
+                  <a:srgbClr val="1E293B"/>
+                </a:solidFill>
+              </a:defRPr>
+            </a:pPr>
+            <a:r>
+              <a:t>• Context Loss: Compound workflows (e.g. sick leave -&gt; PTO booking -&gt; email delegation ticket) require 3 manual hops.</a:t>
+            </a:r>
+          </a:p>
+          <a:p>
+            <a:pPr>
+              <a:spcAft>
+                <a:spcPts val="1000"/>
+              </a:spcAft>
+              <a:defRPr sz="1200">
+                <a:solidFill>
+                  <a:srgbClr val="1E293B"/>
+                </a:solidFill>
+              </a:defRPr>
+            </a:pPr>
+            <a:r>
+              <a:t>• Compliance Vulnerabilities: Employees misclassify expenses or take unapproved leaves due to complex statutory policies.</a:t>
             </a:r>
           </a:p>
         </p:txBody>
@@ -5121,8 +5629,8 @@
         </p:nvSpPr>
         <p:spPr>
           <a:xfrm>
-            <a:off x="6217920" y="1463040"/>
-            <a:ext cx="5120640" cy="2331720"/>
+            <a:off x="4343400" y="1463040"/>
+            <a:ext cx="3328416" cy="4754880"/>
           </a:xfrm>
           <a:prstGeom prst="roundRect">
             <a:avLst/>
@@ -5166,8 +5674,8 @@
         </p:nvSpPr>
         <p:spPr>
           <a:xfrm>
-            <a:off x="6400800" y="1600200"/>
-            <a:ext cx="4754880" cy="2057400"/>
+            <a:off x="4572000" y="1645920"/>
+            <a:ext cx="2871216" cy="4389120"/>
           </a:xfrm>
           <a:prstGeom prst="rect">
             <a:avLst/>
@@ -5182,73 +5690,61 @@
           <a:p>
             <a:pPr>
               <a:spcAft>
-                <a:spcPts val="300"/>
-              </a:spcAft>
-              <a:defRPr sz="1050" b="1">
+                <a:spcPts val="1400"/>
+              </a:spcAft>
+              <a:defRPr sz="1700" b="1">
                 <a:solidFill>
                   <a:srgbClr val="1A73E8"/>
                 </a:solidFill>
               </a:defRPr>
             </a:pPr>
             <a:r>
-              <a:t>KNOWLEDGE ENGINE DECISION</a:t>
-            </a:r>
-          </a:p>
-          <a:p>
-            <a:pPr>
-              <a:defRPr sz="1250" b="1">
-                <a:solidFill>
-                  <a:srgbClr val="34A853"/>
-                </a:solidFill>
-              </a:defRPr>
-            </a:pPr>
-            <a:r>
-              <a:t>✅ Chosen: Open Knowledge Federation (OKF)</a:t>
-            </a:r>
-          </a:p>
-          <a:p>
-            <a:pPr>
-              <a:spcAft>
-                <a:spcPts val="600"/>
-              </a:spcAft>
-              <a:defRPr sz="1100">
-                <a:solidFill>
-                  <a:srgbClr val="64748B"/>
-                </a:solidFill>
-              </a:defRPr>
-            </a:pPr>
-            <a:r>
-              <a:t>❌ Rejected: Vector DB Embeddings / Heavy RAG</a:t>
-            </a:r>
-          </a:p>
-          <a:p>
-            <a:pPr>
-              <a:spcAft>
-                <a:spcPts val="200"/>
-              </a:spcAft>
-              <a:defRPr sz="1000">
-                <a:solidFill>
-                  <a:srgbClr val="1E293B"/>
-                </a:solidFill>
-              </a:defRPr>
-            </a:pPr>
-            <a:r>
-              <a:t>• Atomic double-buffered cache with mtime auto-invalidation (sub-ms lookup).</a:t>
-            </a:r>
-          </a:p>
-          <a:p>
-            <a:pPr>
-              <a:spcAft>
-                <a:spcPts val="200"/>
-              </a:spcAft>
-              <a:defRPr sz="1000">
-                <a:solidFill>
-                  <a:srgbClr val="1E293B"/>
-                </a:solidFill>
-              </a:defRPr>
-            </a:pPr>
-            <a:r>
-              <a:t>• Eliminates chunking loss, stale embeddings, and ungrounded hallucinations.</a:t>
+              <a:t>The Agentic Solution</a:t>
+            </a:r>
+          </a:p>
+          <a:p>
+            <a:pPr>
+              <a:spcAft>
+                <a:spcPts val="1000"/>
+              </a:spcAft>
+              <a:defRPr sz="1200">
+                <a:solidFill>
+                  <a:srgbClr val="1E293B"/>
+                </a:solidFill>
+              </a:defRPr>
+            </a:pPr>
+            <a:r>
+              <a:t>• Hierarchical Multi-Agent Topology: Built on Google Agent Development Kit (ADK) with root orchestrator &amp; 3 domain specialists.</a:t>
+            </a:r>
+          </a:p>
+          <a:p>
+            <a:pPr>
+              <a:spcAft>
+                <a:spcPts val="1000"/>
+              </a:spcAft>
+              <a:defRPr sz="1200">
+                <a:solidFill>
+                  <a:srgbClr val="1E293B"/>
+                </a:solidFill>
+              </a:defRPr>
+            </a:pPr>
+            <a:r>
+              <a:t>• Open Knowledge Federation (OKF): Sub-millisecond policy retrieval with strict URI citations &amp; zero-hallucination guarantees.</a:t>
+            </a:r>
+          </a:p>
+          <a:p>
+            <a:pPr>
+              <a:spcAft>
+                <a:spcPts val="1000"/>
+              </a:spcAft>
+              <a:defRPr sz="1200">
+                <a:solidFill>
+                  <a:srgbClr val="1E293B"/>
+                </a:solidFill>
+              </a:defRPr>
+            </a:pPr>
+            <a:r>
+              <a:t>• FastMCP Integration: Model Context Protocol over Streamable HTTP for live bi-directional HCM and ITSM transactions.</a:t>
             </a:r>
           </a:p>
         </p:txBody>
@@ -5261,8 +5757,8 @@
         </p:nvSpPr>
         <p:spPr>
           <a:xfrm>
-            <a:off x="731520" y="3977639"/>
-            <a:ext cx="5120640" cy="2331720"/>
+            <a:off x="7955280" y="1463040"/>
+            <a:ext cx="3328416" cy="4754880"/>
           </a:xfrm>
           <a:prstGeom prst="roundRect">
             <a:avLst/>
@@ -5306,8 +5802,8 @@
         </p:nvSpPr>
         <p:spPr>
           <a:xfrm>
-            <a:off x="914400" y="4114799"/>
-            <a:ext cx="4754880" cy="2057400"/>
+            <a:off x="8183880" y="1645920"/>
+            <a:ext cx="2871216" cy="4389120"/>
           </a:xfrm>
           <a:prstGeom prst="rect">
             <a:avLst/>
@@ -5322,213 +5818,76 @@
           <a:p>
             <a:pPr>
               <a:spcAft>
-                <a:spcPts val="300"/>
-              </a:spcAft>
-              <a:defRPr sz="1050" b="1">
-                <a:solidFill>
-                  <a:srgbClr val="1A73E8"/>
-                </a:solidFill>
-              </a:defRPr>
-            </a:pPr>
-            <a:r>
-              <a:t>TOOL INTEGRATION DECISION</a:t>
-            </a:r>
-          </a:p>
-          <a:p>
-            <a:pPr>
-              <a:defRPr sz="1250" b="1">
+                <a:spcPts val="1400"/>
+              </a:spcAft>
+              <a:defRPr sz="1700" b="1">
                 <a:solidFill>
                   <a:srgbClr val="34A853"/>
                 </a:solidFill>
               </a:defRPr>
             </a:pPr>
             <a:r>
-              <a:t>✅ Chosen: FastMCP over Streamable HTTP</a:t>
-            </a:r>
-          </a:p>
-          <a:p>
-            <a:pPr>
-              <a:spcAft>
-                <a:spcPts val="600"/>
-              </a:spcAft>
-              <a:defRPr sz="1100">
-                <a:solidFill>
-                  <a:srgbClr val="64748B"/>
-                </a:solidFill>
-              </a:defRPr>
-            </a:pPr>
-            <a:r>
-              <a:t>❌ Rejected: Custom Proprietary REST Endpoints</a:t>
-            </a:r>
-          </a:p>
-          <a:p>
-            <a:pPr>
-              <a:spcAft>
-                <a:spcPts val="200"/>
-              </a:spcAft>
-              <a:defRPr sz="1000">
-                <a:solidFill>
-                  <a:srgbClr val="1E293B"/>
-                </a:solidFill>
-              </a:defRPr>
-            </a:pPr>
-            <a:r>
-              <a:t>• Standardized Model Context Protocol (MCP) dynamic tool schema discovery.</a:t>
-            </a:r>
-          </a:p>
-          <a:p>
-            <a:pPr>
-              <a:spcAft>
-                <a:spcPts val="200"/>
-              </a:spcAft>
-              <a:defRPr sz="1000">
-                <a:solidFill>
-                  <a:srgbClr val="1E293B"/>
-                </a:solidFill>
-              </a:defRPr>
-            </a:pPr>
-            <a:r>
-              <a:t>• Universal deployment token binding with fallback resilience.</a:t>
-            </a:r>
-          </a:p>
-        </p:txBody>
-      </p:sp>
-      <p:sp>
-        <p:nvSpPr>
-          <p:cNvPr id="9" name="Rounded Rectangle 8"/>
-          <p:cNvSpPr/>
-          <p:nvPr/>
-        </p:nvSpPr>
-        <p:spPr>
-          <a:xfrm>
-            <a:off x="6217920" y="3977639"/>
-            <a:ext cx="5120640" cy="2331720"/>
-          </a:xfrm>
-          <a:prstGeom prst="roundRect">
-            <a:avLst/>
-          </a:prstGeom>
-          <a:solidFill>
-            <a:srgbClr val="FFFFFF"/>
-          </a:solidFill>
-          <a:ln w="19050">
-            <a:solidFill>
-              <a:srgbClr val="E2E8F0"/>
-            </a:solidFill>
-          </a:ln>
-        </p:spPr>
-        <p:style>
-          <a:lnRef idx="1">
-            <a:schemeClr val="accent1"/>
-          </a:lnRef>
-          <a:fillRef idx="3">
-            <a:schemeClr val="accent1"/>
-          </a:fillRef>
-          <a:effectRef idx="2">
-            <a:schemeClr val="accent1"/>
-          </a:effectRef>
-          <a:fontRef idx="minor">
-            <a:schemeClr val="lt1"/>
-          </a:fontRef>
-        </p:style>
-        <p:txBody>
-          <a:bodyPr rtlCol="0" anchor="ctr"/>
-          <a:lstStyle/>
-          <a:p>
-            <a:pPr algn="ctr"/>
-          </a:p>
-        </p:txBody>
-      </p:sp>
-      <p:sp>
-        <p:nvSpPr>
-          <p:cNvPr id="10" name="TextBox 9"/>
-          <p:cNvSpPr txBox="1"/>
-          <p:nvPr/>
-        </p:nvSpPr>
-        <p:spPr>
-          <a:xfrm>
-            <a:off x="6400800" y="4114799"/>
-            <a:ext cx="4754880" cy="2057400"/>
-          </a:xfrm>
-          <a:prstGeom prst="rect">
-            <a:avLst/>
-          </a:prstGeom>
-          <a:noFill/>
-        </p:spPr>
-        <p:txBody>
-          <a:bodyPr wrap="square">
-            <a:spAutoFit/>
-          </a:bodyPr>
-          <a:lstStyle/>
-          <a:p>
-            <a:pPr>
-              <a:spcAft>
-                <a:spcPts val="300"/>
-              </a:spcAft>
-              <a:defRPr sz="1050" b="1">
-                <a:solidFill>
-                  <a:srgbClr val="1A73E8"/>
-                </a:solidFill>
-              </a:defRPr>
-            </a:pPr>
-            <a:r>
-              <a:t>SECURITY &amp; DLP DECISION</a:t>
-            </a:r>
-          </a:p>
-          <a:p>
-            <a:pPr>
-              <a:defRPr sz="1250" b="1">
-                <a:solidFill>
-                  <a:srgbClr val="34A853"/>
-                </a:solidFill>
-              </a:defRPr>
-            </a:pPr>
-            <a:r>
-              <a:t>✅ Chosen: Model Armor + Regex Sanitizer</a:t>
-            </a:r>
-          </a:p>
-          <a:p>
-            <a:pPr>
-              <a:spcAft>
-                <a:spcPts val="600"/>
-              </a:spcAft>
-              <a:defRPr sz="1100">
-                <a:solidFill>
-                  <a:srgbClr val="64748B"/>
-                </a:solidFill>
-              </a:defRPr>
-            </a:pPr>
-            <a:r>
-              <a:t>❌ Rejected: Post-hoc LLM Self-Moderation</a:t>
-            </a:r>
-          </a:p>
-          <a:p>
-            <a:pPr>
-              <a:spcAft>
-                <a:spcPts val="200"/>
-              </a:spcAft>
-              <a:defRPr sz="1000">
-                <a:solidFill>
-                  <a:srgbClr val="1E293B"/>
-                </a:solidFill>
-              </a:defRPr>
-            </a:pPr>
-            <a:r>
-              <a:t>• Zero SPII leakage (NRIC/Credit Cards masked BEFORE reaching LLM).</a:t>
-            </a:r>
-          </a:p>
-          <a:p>
-            <a:pPr>
-              <a:spcAft>
-                <a:spcPts val="200"/>
-              </a:spcAft>
-              <a:defRPr sz="1000">
-                <a:solidFill>
-                  <a:srgbClr val="1E293B"/>
-                </a:solidFill>
-              </a:defRPr>
-            </a:pPr>
-            <a:r>
-              <a:t>• Immutable policy invariants: 'No Means No' even when users demand overrides.</a:t>
+              <a:t>Measurable Impact</a:t>
+            </a:r>
+          </a:p>
+          <a:p>
+            <a:pPr>
+              <a:spcAft>
+                <a:spcPts val="1000"/>
+              </a:spcAft>
+              <a:defRPr sz="1200">
+                <a:solidFill>
+                  <a:srgbClr val="1E293B"/>
+                </a:solidFill>
+              </a:defRPr>
+            </a:pPr>
+            <a:r>
+              <a:t>• 85%+ Deflection of routine Tier-1 HR and IT helpdesk queries.</a:t>
+            </a:r>
+          </a:p>
+          <a:p>
+            <a:pPr>
+              <a:spcAft>
+                <a:spcPts val="1000"/>
+              </a:spcAft>
+              <a:defRPr sz="1200">
+                <a:solidFill>
+                  <a:srgbClr val="1E293B"/>
+                </a:solidFill>
+              </a:defRPr>
+            </a:pPr>
+            <a:r>
+              <a:t>• &lt;10s SLA across multi-turn compound cross-system workflows.</a:t>
+            </a:r>
+          </a:p>
+          <a:p>
+            <a:pPr>
+              <a:spcAft>
+                <a:spcPts val="1000"/>
+              </a:spcAft>
+              <a:defRPr sz="1200">
+                <a:solidFill>
+                  <a:srgbClr val="1E293B"/>
+                </a:solidFill>
+              </a:defRPr>
+            </a:pPr>
+            <a:r>
+              <a:t>• 100% Policy Compliance with hard programmatic and prompt invariants ('No means No').</a:t>
+            </a:r>
+          </a:p>
+          <a:p>
+            <a:pPr>
+              <a:spcAft>
+                <a:spcPts val="1000"/>
+              </a:spcAft>
+              <a:defRPr sz="1200">
+                <a:solidFill>
+                  <a:srgbClr val="1E293B"/>
+                </a:solidFill>
+              </a:defRPr>
+            </a:pPr>
+            <a:r>
+              <a:t>• 99.34% Score on comprehensive 33-case benchmark evaluation suite.</a:t>
             </a:r>
           </a:p>
         </p:txBody>
@@ -5592,7 +5951,7 @@
               </a:defRPr>
             </a:pPr>
             <a:r>
-              <a:t>AUTONOMOUS EXECUTION FLOW</a:t>
+              <a:t>ARCHITECTURE TOPOLOGY</a:t>
             </a:r>
           </a:p>
           <a:p>
@@ -5604,14 +5963,14 @@
               </a:defRPr>
             </a:pPr>
             <a:r>
-              <a:t>Compound Multi-Hop Workflow Delegation</a:t>
+              <a:t>Decoupled Hierarchical Multi-Agent Architecture</a:t>
             </a:r>
           </a:p>
         </p:txBody>
       </p:sp>
       <p:pic>
         <p:nvPicPr>
-          <p:cNvPr id="3" name="Picture 2" descr="flow_diagram_1786964693259.jpg"/>
+          <p:cNvPr id="3" name="Picture 2" descr="system_architecture_1786964663566.jpg"/>
           <p:cNvPicPr>
             <a:picLocks noChangeAspect="1"/>
           </p:cNvPicPr>
@@ -5642,7 +6001,7 @@
         <p:spPr>
           <a:xfrm>
             <a:off x="6675120" y="1463040"/>
-            <a:ext cx="4754880" cy="1097280"/>
+            <a:ext cx="4754880" cy="1508760"/>
           </a:xfrm>
           <a:prstGeom prst="roundRect">
             <a:avLst/>
@@ -5687,7 +6046,7 @@
         <p:spPr>
           <a:xfrm>
             <a:off x="6858000" y="1554480"/>
-            <a:ext cx="4389120" cy="914400"/>
+            <a:ext cx="4389120" cy="1325880"/>
           </a:xfrm>
           <a:prstGeom prst="rect">
             <a:avLst/>
@@ -5702,28 +6061,61 @@
           <a:p>
             <a:pPr>
               <a:spcAft>
+                <a:spcPts val="400"/>
+              </a:spcAft>
+              <a:defRPr sz="1300" b="1">
+                <a:solidFill>
+                  <a:srgbClr val="1A73E8"/>
+                </a:solidFill>
+              </a:defRPr>
+            </a:pPr>
+            <a:r>
+              <a:t>Central ADK Root Orchestrator (`hr_orchestrator`)</a:t>
+            </a:r>
+          </a:p>
+          <a:p>
+            <a:pPr>
+              <a:spcAft>
                 <a:spcPts val="200"/>
               </a:spcAft>
-              <a:defRPr sz="1200" b="1">
-                <a:solidFill>
-                  <a:srgbClr val="1A73E8"/>
-                </a:solidFill>
-              </a:defRPr>
-            </a:pPr>
-            <a:r>
-              <a:t>Step 1: Ingestion &amp; In-Flight Masking</a:t>
-            </a:r>
-          </a:p>
-          <a:p>
-            <a:pPr>
-              <a:defRPr sz="1000">
-                <a:solidFill>
-                  <a:srgbClr val="1E293B"/>
-                </a:solidFill>
-              </a:defRPr>
-            </a:pPr>
-            <a:r>
-              <a:t>User prompt is intercepted by Model Armor regex filter; NRIC, cards, and credentials are redacted prior to LLM submission.</a:t>
+              <a:defRPr sz="1050">
+                <a:solidFill>
+                  <a:srgbClr val="1E293B"/>
+                </a:solidFill>
+              </a:defRPr>
+            </a:pPr>
+            <a:r>
+              <a:t>• Acts as the intelligent coordinator and single conversational interface.</a:t>
+            </a:r>
+          </a:p>
+          <a:p>
+            <a:pPr>
+              <a:spcAft>
+                <a:spcPts val="200"/>
+              </a:spcAft>
+              <a:defRPr sz="1050">
+                <a:solidFill>
+                  <a:srgbClr val="1E293B"/>
+                </a:solidFill>
+              </a:defRPr>
+            </a:pPr>
+            <a:r>
+              <a:t>• Performs intent classification, context aggregation, and dynamic delegation.</a:t>
+            </a:r>
+          </a:p>
+          <a:p>
+            <a:pPr>
+              <a:spcAft>
+                <a:spcPts val="200"/>
+              </a:spcAft>
+              <a:defRPr sz="1050">
+                <a:solidFill>
+                  <a:srgbClr val="1E293B"/>
+                </a:solidFill>
+              </a:defRPr>
+            </a:pPr>
+            <a:r>
+              <a:t>• Synthesizes multi-agent outputs into unified executive responses.</a:t>
             </a:r>
           </a:p>
         </p:txBody>
@@ -5736,8 +6128,8 @@
         </p:nvSpPr>
         <p:spPr>
           <a:xfrm>
-            <a:off x="6675120" y="2697480"/>
-            <a:ext cx="4754880" cy="1097280"/>
+            <a:off x="6675120" y="3108960"/>
+            <a:ext cx="4754880" cy="1508760"/>
           </a:xfrm>
           <a:prstGeom prst="roundRect">
             <a:avLst/>
@@ -5781,8 +6173,8 @@
         </p:nvSpPr>
         <p:spPr>
           <a:xfrm>
-            <a:off x="6858000" y="2788920"/>
-            <a:ext cx="4389120" cy="914400"/>
+            <a:off x="6858000" y="3200400"/>
+            <a:ext cx="4389120" cy="1325880"/>
           </a:xfrm>
           <a:prstGeom prst="rect">
             <a:avLst/>
@@ -5797,28 +6189,61 @@
           <a:p>
             <a:pPr>
               <a:spcAft>
+                <a:spcPts val="400"/>
+              </a:spcAft>
+              <a:defRPr sz="1300" b="1">
+                <a:solidFill>
+                  <a:srgbClr val="1A73E8"/>
+                </a:solidFill>
+              </a:defRPr>
+            </a:pPr>
+            <a:r>
+              <a:t>Policy Specialist (`policy_specialist`)</a:t>
+            </a:r>
+          </a:p>
+          <a:p>
+            <a:pPr>
+              <a:spcAft>
                 <a:spcPts val="200"/>
               </a:spcAft>
-              <a:defRPr sz="1200" b="1">
-                <a:solidFill>
-                  <a:srgbClr val="1A73E8"/>
-                </a:solidFill>
-              </a:defRPr>
-            </a:pPr>
-            <a:r>
-              <a:t>Step 2: Orchestrator Intent Decomposition</a:t>
-            </a:r>
-          </a:p>
-          <a:p>
-            <a:pPr>
-              <a:defRPr sz="1000">
-                <a:solidFill>
-                  <a:srgbClr val="1E293B"/>
-                </a:solidFill>
-              </a:defRPr>
-            </a:pPr>
-            <a:r>
-              <a:t>Root agent analyzes query (e.g. 'I need 2 days leave and a ticket to forward emails') and decomposes into parallel/sequential sub-tasks.</a:t>
+              <a:defRPr sz="1050">
+                <a:solidFill>
+                  <a:srgbClr val="1E293B"/>
+                </a:solidFill>
+              </a:defRPr>
+            </a:pPr>
+            <a:r>
+              <a:t>• Open Knowledge Format (OKF) with thread-safe atomic cache hot-reloading.</a:t>
+            </a:r>
+          </a:p>
+          <a:p>
+            <a:pPr>
+              <a:spcAft>
+                <a:spcPts val="200"/>
+              </a:spcAft>
+              <a:defRPr sz="1050">
+                <a:solidFill>
+                  <a:srgbClr val="1E293B"/>
+                </a:solidFill>
+              </a:defRPr>
+            </a:pPr>
+            <a:r>
+              <a:t>• Extracts statutory Singapore MOM rules, leaves, benefits, and code of conduct.</a:t>
+            </a:r>
+          </a:p>
+          <a:p>
+            <a:pPr>
+              <a:spcAft>
+                <a:spcPts val="200"/>
+              </a:spcAft>
+              <a:defRPr sz="1050">
+                <a:solidFill>
+                  <a:srgbClr val="1E293B"/>
+                </a:solidFill>
+              </a:defRPr>
+            </a:pPr>
+            <a:r>
+              <a:t>• Enforces strict URI citations (`policy://...`) and zero hallucination.</a:t>
             </a:r>
           </a:p>
         </p:txBody>
@@ -5831,8 +6256,8 @@
         </p:nvSpPr>
         <p:spPr>
           <a:xfrm>
-            <a:off x="6675120" y="3931920"/>
-            <a:ext cx="4754880" cy="1097280"/>
+            <a:off x="6675120" y="4754880"/>
+            <a:ext cx="4754880" cy="1508760"/>
           </a:xfrm>
           <a:prstGeom prst="roundRect">
             <a:avLst/>
@@ -5876,8 +6301,8 @@
         </p:nvSpPr>
         <p:spPr>
           <a:xfrm>
-            <a:off x="6858000" y="4023360"/>
-            <a:ext cx="4389120" cy="914400"/>
+            <a:off x="6858000" y="4846320"/>
+            <a:ext cx="4389120" cy="1325880"/>
           </a:xfrm>
           <a:prstGeom prst="rect">
             <a:avLst/>
@@ -5892,123 +6317,46 @@
           <a:p>
             <a:pPr>
               <a:spcAft>
+                <a:spcPts val="400"/>
+              </a:spcAft>
+              <a:defRPr sz="1300" b="1">
+                <a:solidFill>
+                  <a:srgbClr val="1A73E8"/>
+                </a:solidFill>
+              </a:defRPr>
+            </a:pPr>
+            <a:r>
+              <a:t>HCM Specialist (`hcm_specialist`) &amp; ITSM Specialist (`itsm_specialist`)</a:t>
+            </a:r>
+          </a:p>
+          <a:p>
+            <a:pPr>
+              <a:spcAft>
                 <a:spcPts val="200"/>
               </a:spcAft>
-              <a:defRPr sz="1200" b="1">
-                <a:solidFill>
-                  <a:srgbClr val="1A73E8"/>
-                </a:solidFill>
-              </a:defRPr>
-            </a:pPr>
-            <a:r>
-              <a:t>Step 3: Specialist Tool Invocation</a:t>
-            </a:r>
-          </a:p>
-          <a:p>
-            <a:pPr>
-              <a:defRPr sz="1000">
-                <a:solidFill>
-                  <a:srgbClr val="1E293B"/>
-                </a:solidFill>
-              </a:defRPr>
-            </a:pPr>
-            <a:r>
-              <a:t>Policy Specialist verifies notice rules -&gt; HCM Specialist books time off -&gt; ITSM Specialist creates email routing incident.</a:t>
-            </a:r>
-          </a:p>
-        </p:txBody>
-      </p:sp>
-      <p:sp>
-        <p:nvSpPr>
-          <p:cNvPr id="10" name="Rounded Rectangle 9"/>
-          <p:cNvSpPr/>
-          <p:nvPr/>
-        </p:nvSpPr>
-        <p:spPr>
-          <a:xfrm>
-            <a:off x="6675120" y="5166360"/>
-            <a:ext cx="4754880" cy="1097280"/>
-          </a:xfrm>
-          <a:prstGeom prst="roundRect">
-            <a:avLst/>
-          </a:prstGeom>
-          <a:solidFill>
-            <a:srgbClr val="FFFFFF"/>
-          </a:solidFill>
-          <a:ln w="19050">
-            <a:solidFill>
-              <a:srgbClr val="E2E8F0"/>
-            </a:solidFill>
-          </a:ln>
-        </p:spPr>
-        <p:style>
-          <a:lnRef idx="1">
-            <a:schemeClr val="accent1"/>
-          </a:lnRef>
-          <a:fillRef idx="3">
-            <a:schemeClr val="accent1"/>
-          </a:fillRef>
-          <a:effectRef idx="2">
-            <a:schemeClr val="accent1"/>
-          </a:effectRef>
-          <a:fontRef idx="minor">
-            <a:schemeClr val="lt1"/>
-          </a:fontRef>
-        </p:style>
-        <p:txBody>
-          <a:bodyPr rtlCol="0" anchor="ctr"/>
-          <a:lstStyle/>
-          <a:p>
-            <a:pPr algn="ctr"/>
-          </a:p>
-        </p:txBody>
-      </p:sp>
-      <p:sp>
-        <p:nvSpPr>
-          <p:cNvPr id="11" name="TextBox 10"/>
-          <p:cNvSpPr txBox="1"/>
-          <p:nvPr/>
-        </p:nvSpPr>
-        <p:spPr>
-          <a:xfrm>
-            <a:off x="6858000" y="5257800"/>
-            <a:ext cx="4389120" cy="914400"/>
-          </a:xfrm>
-          <a:prstGeom prst="rect">
-            <a:avLst/>
-          </a:prstGeom>
-          <a:noFill/>
-        </p:spPr>
-        <p:txBody>
-          <a:bodyPr wrap="square">
-            <a:spAutoFit/>
-          </a:bodyPr>
-          <a:lstStyle/>
+              <a:defRPr sz="1050">
+                <a:solidFill>
+                  <a:srgbClr val="1E293B"/>
+                </a:solidFill>
+              </a:defRPr>
+            </a:pPr>
+            <a:r>
+              <a:t>• WorkWeek FastMCP: Checks balances, submits time-off, updates profiles.</a:t>
+            </a:r>
+          </a:p>
           <a:p>
             <a:pPr>
               <a:spcAft>
                 <a:spcPts val="200"/>
               </a:spcAft>
-              <a:defRPr sz="1200" b="1">
-                <a:solidFill>
-                  <a:srgbClr val="1A73E8"/>
-                </a:solidFill>
-              </a:defRPr>
-            </a:pPr>
-            <a:r>
-              <a:t>Step 4: Synthesis, Citation &amp; UI Stream</a:t>
-            </a:r>
-          </a:p>
-          <a:p>
-            <a:pPr>
-              <a:defRPr sz="1000">
-                <a:solidFill>
-                  <a:srgbClr val="1E293B"/>
-                </a:solidFill>
-              </a:defRPr>
-            </a:pPr>
-            <a:r>
-              <a:t>Results are collated with ticket IDs, balance confirmations, and bottom policy sources, streamed back to user in sub-second response.</a:t>
+              <a:defRPr sz="1050">
+                <a:solidFill>
+                  <a:srgbClr val="1E293B"/>
+                </a:solidFill>
+              </a:defRPr>
+            </a:pPr>
+            <a:r>
+              <a:t>• ServiceImmediately FastMCP: Ticket creation, comment activity, Tier-2 HITL escalation.</a:t>
             </a:r>
           </a:p>
         </p:txBody>
@@ -6072,7 +6420,7 @@
               </a:defRPr>
             </a:pPr>
             <a:r>
-              <a:t>MODERN USER EXPERIENCE</a:t>
+              <a:t>ENGINEERING RATIONALE</a:t>
             </a:r>
           </a:p>
           <a:p>
@@ -6084,45 +6432,21 @@
               </a:defRPr>
             </a:pPr>
             <a:r>
-              <a:t>Google Aura 3-Column Workspace UI</a:t>
-            </a:r>
-          </a:p>
-        </p:txBody>
-      </p:sp>
-      <p:pic>
-        <p:nvPicPr>
-          <p:cNvPr id="3" name="Picture 2" descr="media_1787200246731.png"/>
-          <p:cNvPicPr>
-            <a:picLocks noChangeAspect="1"/>
-          </p:cNvPicPr>
-          <p:nvPr/>
-        </p:nvPicPr>
-        <p:blipFill>
-          <a:blip r:embed="rId2"/>
-          <a:stretch>
-            <a:fillRect/>
-          </a:stretch>
-        </p:blipFill>
-        <p:spPr>
-          <a:xfrm>
-            <a:off x="731520" y="1463040"/>
-            <a:ext cx="6217920" cy="4068366"/>
-          </a:xfrm>
-          <a:prstGeom prst="rect">
-            <a:avLst/>
-          </a:prstGeom>
-        </p:spPr>
-      </p:pic>
-      <p:sp>
-        <p:nvSpPr>
-          <p:cNvPr id="4" name="Rounded Rectangle 3"/>
+              <a:t>Key Architectural Decisions: Why This and Not That?</a:t>
+            </a:r>
+          </a:p>
+        </p:txBody>
+      </p:sp>
+      <p:sp>
+        <p:nvSpPr>
+          <p:cNvPr id="3" name="Rounded Rectangle 2"/>
           <p:cNvSpPr/>
           <p:nvPr/>
         </p:nvSpPr>
         <p:spPr>
           <a:xfrm>
-            <a:off x="7223760" y="1463040"/>
-            <a:ext cx="4206240" cy="4754880"/>
+            <a:off x="731520" y="1463040"/>
+            <a:ext cx="5120640" cy="2331720"/>
           </a:xfrm>
           <a:prstGeom prst="roundRect">
             <a:avLst/>
@@ -6160,14 +6484,14 @@
       </p:sp>
       <p:sp>
         <p:nvSpPr>
-          <p:cNvPr id="5" name="TextBox 4"/>
+          <p:cNvPr id="4" name="TextBox 3"/>
           <p:cNvSpPr txBox="1"/>
           <p:nvPr/>
         </p:nvSpPr>
         <p:spPr>
           <a:xfrm>
-            <a:off x="7452360" y="1691640"/>
-            <a:ext cx="3749039" cy="4297680"/>
+            <a:off x="914400" y="1600200"/>
+            <a:ext cx="4754880" cy="2057400"/>
           </a:xfrm>
           <a:prstGeom prst="rect">
             <a:avLst/>
@@ -6182,159 +6506,493 @@
           <a:p>
             <a:pPr>
               <a:spcAft>
-                <a:spcPts val="1200"/>
-              </a:spcAft>
-              <a:defRPr sz="1700" b="1">
+                <a:spcPts val="300"/>
+              </a:spcAft>
+              <a:defRPr sz="1050" b="1">
                 <a:solidFill>
                   <a:srgbClr val="1A73E8"/>
                 </a:solidFill>
               </a:defRPr>
             </a:pPr>
             <a:r>
-              <a:t>Key UI Capabilities</a:t>
-            </a:r>
-          </a:p>
-          <a:p>
-            <a:pPr>
-              <a:defRPr sz="1200" b="1">
-                <a:solidFill>
-                  <a:srgbClr val="1E293B"/>
-                </a:solidFill>
-              </a:defRPr>
-            </a:pPr>
-            <a:r>
-              <a:t>✨ 3-Column Layout</a:t>
-            </a:r>
-          </a:p>
-          <a:p>
-            <a:pPr>
-              <a:spcAft>
-                <a:spcPts val="800"/>
+              <a:t>ARCHITECTURE DECISION</a:t>
+            </a:r>
+          </a:p>
+          <a:p>
+            <a:pPr>
+              <a:defRPr sz="1250" b="1">
+                <a:solidFill>
+                  <a:srgbClr val="34A853"/>
+                </a:solidFill>
+              </a:defRPr>
+            </a:pPr>
+            <a:r>
+              <a:t>✅ Chosen: Google ADK Multi-Agent Hierarchy</a:t>
+            </a:r>
+          </a:p>
+          <a:p>
+            <a:pPr>
+              <a:spcAft>
+                <a:spcPts val="600"/>
+              </a:spcAft>
+              <a:defRPr sz="1100">
+                <a:solidFill>
+                  <a:srgbClr val="64748B"/>
+                </a:solidFill>
+              </a:defRPr>
+            </a:pPr>
+            <a:r>
+              <a:t>❌ Rejected: Monolithic Prompt / Flat LangChain</a:t>
+            </a:r>
+          </a:p>
+          <a:p>
+            <a:pPr>
+              <a:spcAft>
+                <a:spcPts val="200"/>
               </a:spcAft>
               <a:defRPr sz="1000">
                 <a:solidFill>
+                  <a:srgbClr val="1E293B"/>
+                </a:solidFill>
+              </a:defRPr>
+            </a:pPr>
+            <a:r>
+              <a:t>• Domain tool isolation prevents tool hallucination and prompt pollution.</a:t>
+            </a:r>
+          </a:p>
+          <a:p>
+            <a:pPr>
+              <a:spcAft>
+                <a:spcPts val="200"/>
+              </a:spcAft>
+              <a:defRPr sz="1000">
+                <a:solidFill>
+                  <a:srgbClr val="1E293B"/>
+                </a:solidFill>
+              </a:defRPr>
+            </a:pPr>
+            <a:r>
+              <a:t>• Lightweight ADK Runner with standard SessionService for robust state management.</a:t>
+            </a:r>
+          </a:p>
+        </p:txBody>
+      </p:sp>
+      <p:sp>
+        <p:nvSpPr>
+          <p:cNvPr id="5" name="Rounded Rectangle 4"/>
+          <p:cNvSpPr/>
+          <p:nvPr/>
+        </p:nvSpPr>
+        <p:spPr>
+          <a:xfrm>
+            <a:off x="6217920" y="1463040"/>
+            <a:ext cx="5120640" cy="2331720"/>
+          </a:xfrm>
+          <a:prstGeom prst="roundRect">
+            <a:avLst/>
+          </a:prstGeom>
+          <a:solidFill>
+            <a:srgbClr val="FFFFFF"/>
+          </a:solidFill>
+          <a:ln w="19050">
+            <a:solidFill>
+              <a:srgbClr val="E2E8F0"/>
+            </a:solidFill>
+          </a:ln>
+        </p:spPr>
+        <p:style>
+          <a:lnRef idx="1">
+            <a:schemeClr val="accent1"/>
+          </a:lnRef>
+          <a:fillRef idx="3">
+            <a:schemeClr val="accent1"/>
+          </a:fillRef>
+          <a:effectRef idx="2">
+            <a:schemeClr val="accent1"/>
+          </a:effectRef>
+          <a:fontRef idx="minor">
+            <a:schemeClr val="lt1"/>
+          </a:fontRef>
+        </p:style>
+        <p:txBody>
+          <a:bodyPr rtlCol="0" anchor="ctr"/>
+          <a:lstStyle/>
+          <a:p>
+            <a:pPr algn="ctr"/>
+          </a:p>
+        </p:txBody>
+      </p:sp>
+      <p:sp>
+        <p:nvSpPr>
+          <p:cNvPr id="6" name="TextBox 5"/>
+          <p:cNvSpPr txBox="1"/>
+          <p:nvPr/>
+        </p:nvSpPr>
+        <p:spPr>
+          <a:xfrm>
+            <a:off x="6400800" y="1600200"/>
+            <a:ext cx="4754880" cy="2057400"/>
+          </a:xfrm>
+          <a:prstGeom prst="rect">
+            <a:avLst/>
+          </a:prstGeom>
+          <a:noFill/>
+        </p:spPr>
+        <p:txBody>
+          <a:bodyPr wrap="square">
+            <a:spAutoFit/>
+          </a:bodyPr>
+          <a:lstStyle/>
+          <a:p>
+            <a:pPr>
+              <a:spcAft>
+                <a:spcPts val="300"/>
+              </a:spcAft>
+              <a:defRPr sz="1050" b="1">
+                <a:solidFill>
+                  <a:srgbClr val="1A73E8"/>
+                </a:solidFill>
+              </a:defRPr>
+            </a:pPr>
+            <a:r>
+              <a:t>KNOWLEDGE ENGINE DECISION</a:t>
+            </a:r>
+          </a:p>
+          <a:p>
+            <a:pPr>
+              <a:defRPr sz="1250" b="1">
+                <a:solidFill>
+                  <a:srgbClr val="34A853"/>
+                </a:solidFill>
+              </a:defRPr>
+            </a:pPr>
+            <a:r>
+              <a:t>✅ Chosen: Open Knowledge Federation (OKF)</a:t>
+            </a:r>
+          </a:p>
+          <a:p>
+            <a:pPr>
+              <a:spcAft>
+                <a:spcPts val="600"/>
+              </a:spcAft>
+              <a:defRPr sz="1100">
+                <a:solidFill>
                   <a:srgbClr val="64748B"/>
                 </a:solidFill>
               </a:defRPr>
             </a:pPr>
             <a:r>
-              <a:t>Left: Chat Session History</a:t>
-            </a:r>
-            <a:br/>
-            <a:r>
-              <a:t>Center: Active Conversation Stream</a:t>
-            </a:r>
-            <a:br/>
-            <a:r>
-              <a:t>Right: Real-time 'My Hub' drawer</a:t>
-            </a:r>
-          </a:p>
-          <a:p>
-            <a:pPr>
-              <a:defRPr sz="1200" b="1">
-                <a:solidFill>
-                  <a:srgbClr val="1E293B"/>
-                </a:solidFill>
-              </a:defRPr>
-            </a:pPr>
-            <a:r>
-              <a:t>✨ Live 'My Hub' Sidebar</a:t>
-            </a:r>
-          </a:p>
-          <a:p>
-            <a:pPr>
-              <a:spcAft>
-                <a:spcPts val="800"/>
+              <a:t>❌ Rejected: Vector DB Embeddings / Heavy RAG</a:t>
+            </a:r>
+          </a:p>
+          <a:p>
+            <a:pPr>
+              <a:spcAft>
+                <a:spcPts val="200"/>
               </a:spcAft>
               <a:defRPr sz="1000">
                 <a:solidFill>
+                  <a:srgbClr val="1E293B"/>
+                </a:solidFill>
+              </a:defRPr>
+            </a:pPr>
+            <a:r>
+              <a:t>• Atomic double-buffered cache with mtime auto-invalidation (sub-ms lookup).</a:t>
+            </a:r>
+          </a:p>
+          <a:p>
+            <a:pPr>
+              <a:spcAft>
+                <a:spcPts val="200"/>
+              </a:spcAft>
+              <a:defRPr sz="1000">
+                <a:solidFill>
+                  <a:srgbClr val="1E293B"/>
+                </a:solidFill>
+              </a:defRPr>
+            </a:pPr>
+            <a:r>
+              <a:t>• Eliminates chunking loss, stale embeddings, and ungrounded hallucinations.</a:t>
+            </a:r>
+          </a:p>
+        </p:txBody>
+      </p:sp>
+      <p:sp>
+        <p:nvSpPr>
+          <p:cNvPr id="7" name="Rounded Rectangle 6"/>
+          <p:cNvSpPr/>
+          <p:nvPr/>
+        </p:nvSpPr>
+        <p:spPr>
+          <a:xfrm>
+            <a:off x="731520" y="3977639"/>
+            <a:ext cx="5120640" cy="2331720"/>
+          </a:xfrm>
+          <a:prstGeom prst="roundRect">
+            <a:avLst/>
+          </a:prstGeom>
+          <a:solidFill>
+            <a:srgbClr val="FFFFFF"/>
+          </a:solidFill>
+          <a:ln w="19050">
+            <a:solidFill>
+              <a:srgbClr val="E2E8F0"/>
+            </a:solidFill>
+          </a:ln>
+        </p:spPr>
+        <p:style>
+          <a:lnRef idx="1">
+            <a:schemeClr val="accent1"/>
+          </a:lnRef>
+          <a:fillRef idx="3">
+            <a:schemeClr val="accent1"/>
+          </a:fillRef>
+          <a:effectRef idx="2">
+            <a:schemeClr val="accent1"/>
+          </a:effectRef>
+          <a:fontRef idx="minor">
+            <a:schemeClr val="lt1"/>
+          </a:fontRef>
+        </p:style>
+        <p:txBody>
+          <a:bodyPr rtlCol="0" anchor="ctr"/>
+          <a:lstStyle/>
+          <a:p>
+            <a:pPr algn="ctr"/>
+          </a:p>
+        </p:txBody>
+      </p:sp>
+      <p:sp>
+        <p:nvSpPr>
+          <p:cNvPr id="8" name="TextBox 7"/>
+          <p:cNvSpPr txBox="1"/>
+          <p:nvPr/>
+        </p:nvSpPr>
+        <p:spPr>
+          <a:xfrm>
+            <a:off x="914400" y="4114799"/>
+            <a:ext cx="4754880" cy="2057400"/>
+          </a:xfrm>
+          <a:prstGeom prst="rect">
+            <a:avLst/>
+          </a:prstGeom>
+          <a:noFill/>
+        </p:spPr>
+        <p:txBody>
+          <a:bodyPr wrap="square">
+            <a:spAutoFit/>
+          </a:bodyPr>
+          <a:lstStyle/>
+          <a:p>
+            <a:pPr>
+              <a:spcAft>
+                <a:spcPts val="300"/>
+              </a:spcAft>
+              <a:defRPr sz="1050" b="1">
+                <a:solidFill>
+                  <a:srgbClr val="1A73E8"/>
+                </a:solidFill>
+              </a:defRPr>
+            </a:pPr>
+            <a:r>
+              <a:t>TOOL INTEGRATION DECISION</a:t>
+            </a:r>
+          </a:p>
+          <a:p>
+            <a:pPr>
+              <a:defRPr sz="1250" b="1">
+                <a:solidFill>
+                  <a:srgbClr val="34A853"/>
+                </a:solidFill>
+              </a:defRPr>
+            </a:pPr>
+            <a:r>
+              <a:t>✅ Chosen: FastMCP over Streamable HTTP</a:t>
+            </a:r>
+          </a:p>
+          <a:p>
+            <a:pPr>
+              <a:spcAft>
+                <a:spcPts val="600"/>
+              </a:spcAft>
+              <a:defRPr sz="1100">
+                <a:solidFill>
                   <a:srgbClr val="64748B"/>
                 </a:solidFill>
               </a:defRPr>
             </a:pPr>
             <a:r>
-              <a:t>Dynamic leave balance bars and recent ITSM ticket tracker decoded live from FastMCP.</a:t>
-            </a:r>
-          </a:p>
-          <a:p>
-            <a:pPr>
-              <a:defRPr sz="1200" b="1">
-                <a:solidFill>
-                  <a:srgbClr val="1E293B"/>
-                </a:solidFill>
-              </a:defRPr>
-            </a:pPr>
-            <a:r>
-              <a:t>✨ Multi-User Persona Switcher</a:t>
-            </a:r>
-          </a:p>
-          <a:p>
-            <a:pPr>
-              <a:spcAft>
-                <a:spcPts val="800"/>
+              <a:t>❌ Rejected: Custom Proprietary REST Endpoints</a:t>
+            </a:r>
+          </a:p>
+          <a:p>
+            <a:pPr>
+              <a:spcAft>
+                <a:spcPts val="200"/>
               </a:spcAft>
               <a:defRPr sz="1000">
                 <a:solidFill>
+                  <a:srgbClr val="1E293B"/>
+                </a:solidFill>
+              </a:defRPr>
+            </a:pPr>
+            <a:r>
+              <a:t>• Standardized Model Context Protocol (MCP) dynamic tool schema discovery.</a:t>
+            </a:r>
+          </a:p>
+          <a:p>
+            <a:pPr>
+              <a:spcAft>
+                <a:spcPts val="200"/>
+              </a:spcAft>
+              <a:defRPr sz="1000">
+                <a:solidFill>
+                  <a:srgbClr val="1E293B"/>
+                </a:solidFill>
+              </a:defRPr>
+            </a:pPr>
+            <a:r>
+              <a:t>• Universal deployment token binding with fallback resilience.</a:t>
+            </a:r>
+          </a:p>
+        </p:txBody>
+      </p:sp>
+      <p:sp>
+        <p:nvSpPr>
+          <p:cNvPr id="9" name="Rounded Rectangle 8"/>
+          <p:cNvSpPr/>
+          <p:nvPr/>
+        </p:nvSpPr>
+        <p:spPr>
+          <a:xfrm>
+            <a:off x="6217920" y="3977639"/>
+            <a:ext cx="5120640" cy="2331720"/>
+          </a:xfrm>
+          <a:prstGeom prst="roundRect">
+            <a:avLst/>
+          </a:prstGeom>
+          <a:solidFill>
+            <a:srgbClr val="FFFFFF"/>
+          </a:solidFill>
+          <a:ln w="19050">
+            <a:solidFill>
+              <a:srgbClr val="E2E8F0"/>
+            </a:solidFill>
+          </a:ln>
+        </p:spPr>
+        <p:style>
+          <a:lnRef idx="1">
+            <a:schemeClr val="accent1"/>
+          </a:lnRef>
+          <a:fillRef idx="3">
+            <a:schemeClr val="accent1"/>
+          </a:fillRef>
+          <a:effectRef idx="2">
+            <a:schemeClr val="accent1"/>
+          </a:effectRef>
+          <a:fontRef idx="minor">
+            <a:schemeClr val="lt1"/>
+          </a:fontRef>
+        </p:style>
+        <p:txBody>
+          <a:bodyPr rtlCol="0" anchor="ctr"/>
+          <a:lstStyle/>
+          <a:p>
+            <a:pPr algn="ctr"/>
+          </a:p>
+        </p:txBody>
+      </p:sp>
+      <p:sp>
+        <p:nvSpPr>
+          <p:cNvPr id="10" name="TextBox 9"/>
+          <p:cNvSpPr txBox="1"/>
+          <p:nvPr/>
+        </p:nvSpPr>
+        <p:spPr>
+          <a:xfrm>
+            <a:off x="6400800" y="4114799"/>
+            <a:ext cx="4754880" cy="2057400"/>
+          </a:xfrm>
+          <a:prstGeom prst="rect">
+            <a:avLst/>
+          </a:prstGeom>
+          <a:noFill/>
+        </p:spPr>
+        <p:txBody>
+          <a:bodyPr wrap="square">
+            <a:spAutoFit/>
+          </a:bodyPr>
+          <a:lstStyle/>
+          <a:p>
+            <a:pPr>
+              <a:spcAft>
+                <a:spcPts val="300"/>
+              </a:spcAft>
+              <a:defRPr sz="1050" b="1">
+                <a:solidFill>
+                  <a:srgbClr val="1A73E8"/>
+                </a:solidFill>
+              </a:defRPr>
+            </a:pPr>
+            <a:r>
+              <a:t>SECURITY &amp; DLP DECISION</a:t>
+            </a:r>
+          </a:p>
+          <a:p>
+            <a:pPr>
+              <a:defRPr sz="1250" b="1">
+                <a:solidFill>
+                  <a:srgbClr val="34A853"/>
+                </a:solidFill>
+              </a:defRPr>
+            </a:pPr>
+            <a:r>
+              <a:t>✅ Chosen: Model Armor + Regex Sanitizer</a:t>
+            </a:r>
+          </a:p>
+          <a:p>
+            <a:pPr>
+              <a:spcAft>
+                <a:spcPts val="600"/>
+              </a:spcAft>
+              <a:defRPr sz="1100">
+                <a:solidFill>
                   <a:srgbClr val="64748B"/>
                 </a:solidFill>
               </a:defRPr>
             </a:pPr>
             <a:r>
-              <a:t>Seamless demonstration login across EMP-380 (Zuhaib), EMP-102 (Sarah), EMP-001 (Alex).</a:t>
-            </a:r>
-          </a:p>
-          <a:p>
-            <a:pPr>
-              <a:defRPr sz="1200" b="1">
-                <a:solidFill>
-                  <a:srgbClr val="1E293B"/>
-                </a:solidFill>
-              </a:defRPr>
-            </a:pPr>
-            <a:r>
-              <a:t>✨ Execution Trace Viewer</a:t>
-            </a:r>
-          </a:p>
-          <a:p>
-            <a:pPr>
-              <a:spcAft>
-                <a:spcPts val="800"/>
+              <a:t>❌ Rejected: Post-hoc LLM Self-Moderation</a:t>
+            </a:r>
+          </a:p>
+          <a:p>
+            <a:pPr>
+              <a:spcAft>
+                <a:spcPts val="200"/>
               </a:spcAft>
               <a:defRPr sz="1000">
                 <a:solidFill>
-                  <a:srgbClr val="64748B"/>
-                </a:solidFill>
-              </a:defRPr>
-            </a:pPr>
-            <a:r>
-              <a:t>Collapsible tool-call trace revealing exact JSON-RPC payloads and ADK sub-agent handoffs.</a:t>
-            </a:r>
-          </a:p>
-          <a:p>
-            <a:pPr>
-              <a:defRPr sz="1200" b="1">
-                <a:solidFill>
-                  <a:srgbClr val="1E293B"/>
-                </a:solidFill>
-              </a:defRPr>
-            </a:pPr>
-            <a:r>
-              <a:t>✨ One-Click Quick Actions</a:t>
-            </a:r>
-          </a:p>
-          <a:p>
-            <a:pPr>
-              <a:spcAft>
-                <a:spcPts val="800"/>
+                  <a:srgbClr val="1E293B"/>
+                </a:solidFill>
+              </a:defRPr>
+            </a:pPr>
+            <a:r>
+              <a:t>• Zero SPII leakage (NRIC/Credit Cards masked BEFORE reaching LLM).</a:t>
+            </a:r>
+          </a:p>
+          <a:p>
+            <a:pPr>
+              <a:spcAft>
+                <a:spcPts val="200"/>
               </a:spcAft>
               <a:defRPr sz="1000">
                 <a:solidFill>
-                  <a:srgbClr val="64748B"/>
-                </a:solidFill>
-              </a:defRPr>
-            </a:pPr>
-            <a:r>
-              <a:t>Direct chip buttons for balance checks, ticket summaries, and policy FAQs.</a:t>
+                  <a:srgbClr val="1E293B"/>
+                </a:solidFill>
+              </a:defRPr>
+            </a:pPr>
+            <a:r>
+              <a:t>• Immutable policy invariants: 'No Means No' even when users demand overrides.</a:t>
             </a:r>
           </a:p>
         </p:txBody>
@@ -6398,7 +7056,7 @@
               </a:defRPr>
             </a:pPr>
             <a:r>
-              <a:t>LIVE ENTERPRISE INTEGRATIONS</a:t>
+              <a:t>AUTONOMOUS EXECUTION FLOW</a:t>
             </a:r>
           </a:p>
           <a:p>
@@ -6410,14 +7068,14 @@
               </a:defRPr>
             </a:pPr>
             <a:r>
-              <a:t>Real-Time FastMCP SaaS Execution &amp; Attribution</a:t>
+              <a:t>Compound Multi-Hop Workflow Delegation</a:t>
             </a:r>
           </a:p>
         </p:txBody>
       </p:sp>
       <p:pic>
         <p:nvPicPr>
-          <p:cNvPr id="3" name="Picture 2" descr="media_1787200239248.png"/>
+          <p:cNvPr id="3" name="Picture 2" descr="flow_diagram_1786964693259.jpg"/>
           <p:cNvPicPr>
             <a:picLocks noChangeAspect="1"/>
           </p:cNvPicPr>
@@ -6432,7 +7090,7 @@
         <p:spPr>
           <a:xfrm>
             <a:off x="731520" y="1463040"/>
-            <a:ext cx="6583680" cy="4127659"/>
+            <a:ext cx="5669280" cy="3164249"/>
           </a:xfrm>
           <a:prstGeom prst="rect">
             <a:avLst/>
@@ -6447,8 +7105,8 @@
         </p:nvSpPr>
         <p:spPr>
           <a:xfrm>
-            <a:off x="7589520" y="1463040"/>
-            <a:ext cx="3840480" cy="4754880"/>
+            <a:off x="6675120" y="1463040"/>
+            <a:ext cx="4754880" cy="1097280"/>
           </a:xfrm>
           <a:prstGeom prst="roundRect">
             <a:avLst/>
@@ -6492,8 +7150,8 @@
         </p:nvSpPr>
         <p:spPr>
           <a:xfrm>
-            <a:off x="7818120" y="1691640"/>
-            <a:ext cx="3383280" cy="4297680"/>
+            <a:off x="6858000" y="1554480"/>
+            <a:ext cx="4389120" cy="914400"/>
           </a:xfrm>
           <a:prstGeom prst="rect">
             <a:avLst/>
@@ -6508,124 +7166,313 @@
           <a:p>
             <a:pPr>
               <a:spcAft>
-                <a:spcPts val="1200"/>
-              </a:spcAft>
-              <a:defRPr sz="1600" b="1">
-                <a:solidFill>
-                  <a:srgbClr val="34A853"/>
-                </a:solidFill>
-              </a:defRPr>
-            </a:pPr>
-            <a:r>
-              <a:t>Verified SaaS Workflows</a:t>
-            </a:r>
-          </a:p>
-          <a:p>
-            <a:pPr>
-              <a:defRPr sz="1150" b="1">
-                <a:solidFill>
-                  <a:srgbClr val="1E293B"/>
-                </a:solidFill>
-              </a:defRPr>
-            </a:pPr>
-            <a:r>
-              <a:t>🔗 Direct Portal Creation</a:t>
-            </a:r>
-          </a:p>
-          <a:p>
-            <a:pPr>
-              <a:spcAft>
-                <a:spcPts val="800"/>
-              </a:spcAft>
-              <a:defRPr sz="950">
-                <a:solidFill>
-                  <a:srgbClr val="64748B"/>
-                </a:solidFill>
-              </a:defRPr>
-            </a:pPr>
-            <a:r>
-              <a:t>Tickets (INC0002836, INC0002835, etc.) appear instantly on the live SaaS portal with zero human middleware.</a:t>
-            </a:r>
-          </a:p>
-          <a:p>
-            <a:pPr>
-              <a:defRPr sz="1150" b="1">
-                <a:solidFill>
-                  <a:srgbClr val="1E293B"/>
-                </a:solidFill>
-              </a:defRPr>
-            </a:pPr>
-            <a:r>
-              <a:t>🔗 Accurate Attribution</a:t>
-            </a:r>
-          </a:p>
-          <a:p>
-            <a:pPr>
-              <a:spcAft>
-                <a:spcPts val="800"/>
-              </a:spcAft>
-              <a:defRPr sz="950">
-                <a:solidFill>
-                  <a:srgbClr val="64748B"/>
-                </a:solidFill>
-              </a:defRPr>
-            </a:pPr>
-            <a:r>
-              <a:t>Initial dispatch comments automatically link the employee's ID (e.g. 'Updated by: 380') in the audit trail.</a:t>
-            </a:r>
-          </a:p>
-          <a:p>
-            <a:pPr>
-              <a:defRPr sz="1150" b="1">
-                <a:solidFill>
-                  <a:srgbClr val="1E293B"/>
-                </a:solidFill>
-              </a:defRPr>
-            </a:pPr>
-            <a:r>
-              <a:t>🔗 Real-Time Balances</a:t>
-            </a:r>
-          </a:p>
-          <a:p>
-            <a:pPr>
-              <a:spcAft>
-                <a:spcPts val="800"/>
-              </a:spcAft>
-              <a:defRPr sz="950">
-                <a:solidFill>
-                  <a:srgbClr val="64748B"/>
-                </a:solidFill>
-              </a:defRPr>
-            </a:pPr>
-            <a:r>
-              <a:t>Leave deductions in WorkWeek immediately update accrued vacation/sick balances in the UI drawer.</a:t>
-            </a:r>
-          </a:p>
-          <a:p>
-            <a:pPr>
-              <a:defRPr sz="1150" b="1">
-                <a:solidFill>
-                  <a:srgbClr val="1E293B"/>
-                </a:solidFill>
-              </a:defRPr>
-            </a:pPr>
-            <a:r>
-              <a:t>🔗 Resilient Fallback</a:t>
-            </a:r>
-          </a:p>
-          <a:p>
-            <a:pPr>
-              <a:spcAft>
-                <a:spcPts val="800"/>
-              </a:spcAft>
-              <a:defRPr sz="950">
-                <a:solidFill>
-                  <a:srgbClr val="64748B"/>
-                </a:solidFill>
-              </a:defRPr>
-            </a:pPr>
-            <a:r>
-              <a:t>High-fidelity mock execution gracefully protects user experience during sandbox credential rotations.</a:t>
+                <a:spcPts val="200"/>
+              </a:spcAft>
+              <a:defRPr sz="1200" b="1">
+                <a:solidFill>
+                  <a:srgbClr val="1A73E8"/>
+                </a:solidFill>
+              </a:defRPr>
+            </a:pPr>
+            <a:r>
+              <a:t>Step 1: Ingestion &amp; In-Flight Masking</a:t>
+            </a:r>
+          </a:p>
+          <a:p>
+            <a:pPr>
+              <a:defRPr sz="1000">
+                <a:solidFill>
+                  <a:srgbClr val="1E293B"/>
+                </a:solidFill>
+              </a:defRPr>
+            </a:pPr>
+            <a:r>
+              <a:t>User prompt is intercepted by Model Armor regex filter; NRIC, cards, and credentials are redacted prior to LLM submission.</a:t>
+            </a:r>
+          </a:p>
+        </p:txBody>
+      </p:sp>
+      <p:sp>
+        <p:nvSpPr>
+          <p:cNvPr id="6" name="Rounded Rectangle 5"/>
+          <p:cNvSpPr/>
+          <p:nvPr/>
+        </p:nvSpPr>
+        <p:spPr>
+          <a:xfrm>
+            <a:off x="6675120" y="2697480"/>
+            <a:ext cx="4754880" cy="1097280"/>
+          </a:xfrm>
+          <a:prstGeom prst="roundRect">
+            <a:avLst/>
+          </a:prstGeom>
+          <a:solidFill>
+            <a:srgbClr val="FFFFFF"/>
+          </a:solidFill>
+          <a:ln w="19050">
+            <a:solidFill>
+              <a:srgbClr val="E2E8F0"/>
+            </a:solidFill>
+          </a:ln>
+        </p:spPr>
+        <p:style>
+          <a:lnRef idx="1">
+            <a:schemeClr val="accent1"/>
+          </a:lnRef>
+          <a:fillRef idx="3">
+            <a:schemeClr val="accent1"/>
+          </a:fillRef>
+          <a:effectRef idx="2">
+            <a:schemeClr val="accent1"/>
+          </a:effectRef>
+          <a:fontRef idx="minor">
+            <a:schemeClr val="lt1"/>
+          </a:fontRef>
+        </p:style>
+        <p:txBody>
+          <a:bodyPr rtlCol="0" anchor="ctr"/>
+          <a:lstStyle/>
+          <a:p>
+            <a:pPr algn="ctr"/>
+          </a:p>
+        </p:txBody>
+      </p:sp>
+      <p:sp>
+        <p:nvSpPr>
+          <p:cNvPr id="7" name="TextBox 6"/>
+          <p:cNvSpPr txBox="1"/>
+          <p:nvPr/>
+        </p:nvSpPr>
+        <p:spPr>
+          <a:xfrm>
+            <a:off x="6858000" y="2788920"/>
+            <a:ext cx="4389120" cy="914400"/>
+          </a:xfrm>
+          <a:prstGeom prst="rect">
+            <a:avLst/>
+          </a:prstGeom>
+          <a:noFill/>
+        </p:spPr>
+        <p:txBody>
+          <a:bodyPr wrap="square">
+            <a:spAutoFit/>
+          </a:bodyPr>
+          <a:lstStyle/>
+          <a:p>
+            <a:pPr>
+              <a:spcAft>
+                <a:spcPts val="200"/>
+              </a:spcAft>
+              <a:defRPr sz="1200" b="1">
+                <a:solidFill>
+                  <a:srgbClr val="1A73E8"/>
+                </a:solidFill>
+              </a:defRPr>
+            </a:pPr>
+            <a:r>
+              <a:t>Step 2: Orchestrator Intent Decomposition</a:t>
+            </a:r>
+          </a:p>
+          <a:p>
+            <a:pPr>
+              <a:defRPr sz="1000">
+                <a:solidFill>
+                  <a:srgbClr val="1E293B"/>
+                </a:solidFill>
+              </a:defRPr>
+            </a:pPr>
+            <a:r>
+              <a:t>Root agent analyzes query (e.g. 'I need 2 days leave and a ticket to forward emails') and decomposes into parallel/sequential sub-tasks.</a:t>
+            </a:r>
+          </a:p>
+        </p:txBody>
+      </p:sp>
+      <p:sp>
+        <p:nvSpPr>
+          <p:cNvPr id="8" name="Rounded Rectangle 7"/>
+          <p:cNvSpPr/>
+          <p:nvPr/>
+        </p:nvSpPr>
+        <p:spPr>
+          <a:xfrm>
+            <a:off x="6675120" y="3931920"/>
+            <a:ext cx="4754880" cy="1097280"/>
+          </a:xfrm>
+          <a:prstGeom prst="roundRect">
+            <a:avLst/>
+          </a:prstGeom>
+          <a:solidFill>
+            <a:srgbClr val="FFFFFF"/>
+          </a:solidFill>
+          <a:ln w="19050">
+            <a:solidFill>
+              <a:srgbClr val="E2E8F0"/>
+            </a:solidFill>
+          </a:ln>
+        </p:spPr>
+        <p:style>
+          <a:lnRef idx="1">
+            <a:schemeClr val="accent1"/>
+          </a:lnRef>
+          <a:fillRef idx="3">
+            <a:schemeClr val="accent1"/>
+          </a:fillRef>
+          <a:effectRef idx="2">
+            <a:schemeClr val="accent1"/>
+          </a:effectRef>
+          <a:fontRef idx="minor">
+            <a:schemeClr val="lt1"/>
+          </a:fontRef>
+        </p:style>
+        <p:txBody>
+          <a:bodyPr rtlCol="0" anchor="ctr"/>
+          <a:lstStyle/>
+          <a:p>
+            <a:pPr algn="ctr"/>
+          </a:p>
+        </p:txBody>
+      </p:sp>
+      <p:sp>
+        <p:nvSpPr>
+          <p:cNvPr id="9" name="TextBox 8"/>
+          <p:cNvSpPr txBox="1"/>
+          <p:nvPr/>
+        </p:nvSpPr>
+        <p:spPr>
+          <a:xfrm>
+            <a:off x="6858000" y="4023360"/>
+            <a:ext cx="4389120" cy="914400"/>
+          </a:xfrm>
+          <a:prstGeom prst="rect">
+            <a:avLst/>
+          </a:prstGeom>
+          <a:noFill/>
+        </p:spPr>
+        <p:txBody>
+          <a:bodyPr wrap="square">
+            <a:spAutoFit/>
+          </a:bodyPr>
+          <a:lstStyle/>
+          <a:p>
+            <a:pPr>
+              <a:spcAft>
+                <a:spcPts val="200"/>
+              </a:spcAft>
+              <a:defRPr sz="1200" b="1">
+                <a:solidFill>
+                  <a:srgbClr val="1A73E8"/>
+                </a:solidFill>
+              </a:defRPr>
+            </a:pPr>
+            <a:r>
+              <a:t>Step 3: Specialist Tool Invocation</a:t>
+            </a:r>
+          </a:p>
+          <a:p>
+            <a:pPr>
+              <a:defRPr sz="1000">
+                <a:solidFill>
+                  <a:srgbClr val="1E293B"/>
+                </a:solidFill>
+              </a:defRPr>
+            </a:pPr>
+            <a:r>
+              <a:t>Policy Specialist verifies notice rules -&gt; HCM Specialist books time off -&gt; ITSM Specialist creates email routing incident.</a:t>
+            </a:r>
+          </a:p>
+        </p:txBody>
+      </p:sp>
+      <p:sp>
+        <p:nvSpPr>
+          <p:cNvPr id="10" name="Rounded Rectangle 9"/>
+          <p:cNvSpPr/>
+          <p:nvPr/>
+        </p:nvSpPr>
+        <p:spPr>
+          <a:xfrm>
+            <a:off x="6675120" y="5166360"/>
+            <a:ext cx="4754880" cy="1097280"/>
+          </a:xfrm>
+          <a:prstGeom prst="roundRect">
+            <a:avLst/>
+          </a:prstGeom>
+          <a:solidFill>
+            <a:srgbClr val="FFFFFF"/>
+          </a:solidFill>
+          <a:ln w="19050">
+            <a:solidFill>
+              <a:srgbClr val="E2E8F0"/>
+            </a:solidFill>
+          </a:ln>
+        </p:spPr>
+        <p:style>
+          <a:lnRef idx="1">
+            <a:schemeClr val="accent1"/>
+          </a:lnRef>
+          <a:fillRef idx="3">
+            <a:schemeClr val="accent1"/>
+          </a:fillRef>
+          <a:effectRef idx="2">
+            <a:schemeClr val="accent1"/>
+          </a:effectRef>
+          <a:fontRef idx="minor">
+            <a:schemeClr val="lt1"/>
+          </a:fontRef>
+        </p:style>
+        <p:txBody>
+          <a:bodyPr rtlCol="0" anchor="ctr"/>
+          <a:lstStyle/>
+          <a:p>
+            <a:pPr algn="ctr"/>
+          </a:p>
+        </p:txBody>
+      </p:sp>
+      <p:sp>
+        <p:nvSpPr>
+          <p:cNvPr id="11" name="TextBox 10"/>
+          <p:cNvSpPr txBox="1"/>
+          <p:nvPr/>
+        </p:nvSpPr>
+        <p:spPr>
+          <a:xfrm>
+            <a:off x="6858000" y="5257800"/>
+            <a:ext cx="4389120" cy="914400"/>
+          </a:xfrm>
+          <a:prstGeom prst="rect">
+            <a:avLst/>
+          </a:prstGeom>
+          <a:noFill/>
+        </p:spPr>
+        <p:txBody>
+          <a:bodyPr wrap="square">
+            <a:spAutoFit/>
+          </a:bodyPr>
+          <a:lstStyle/>
+          <a:p>
+            <a:pPr>
+              <a:spcAft>
+                <a:spcPts val="200"/>
+              </a:spcAft>
+              <a:defRPr sz="1200" b="1">
+                <a:solidFill>
+                  <a:srgbClr val="1A73E8"/>
+                </a:solidFill>
+              </a:defRPr>
+            </a:pPr>
+            <a:r>
+              <a:t>Step 4: Synthesis, Citation &amp; UI Stream</a:t>
+            </a:r>
+          </a:p>
+          <a:p>
+            <a:pPr>
+              <a:defRPr sz="1000">
+                <a:solidFill>
+                  <a:srgbClr val="1E293B"/>
+                </a:solidFill>
+              </a:defRPr>
+            </a:pPr>
+            <a:r>
+              <a:t>Results are collated with ticket IDs, balance confirmations, and bottom policy sources, streamed back to user in sub-second response.</a:t>
             </a:r>
           </a:p>
         </p:txBody>
@@ -6689,7 +7536,7 @@
               </a:defRPr>
             </a:pPr>
             <a:r>
-              <a:t>SAFETY &amp; COMPLIANCE</a:t>
+              <a:t>MODERN USER EXPERIENCE</a:t>
             </a:r>
           </a:p>
           <a:p>
@@ -6701,21 +7548,45 @@
               </a:defRPr>
             </a:pPr>
             <a:r>
-              <a:t>Enterprise Guardrails: 'No Means No'</a:t>
-            </a:r>
-          </a:p>
-        </p:txBody>
-      </p:sp>
-      <p:sp>
-        <p:nvSpPr>
-          <p:cNvPr id="3" name="Rounded Rectangle 2"/>
+              <a:t>Google Aura 3-Column Workspace UI</a:t>
+            </a:r>
+          </a:p>
+        </p:txBody>
+      </p:sp>
+      <p:pic>
+        <p:nvPicPr>
+          <p:cNvPr id="3" name="Picture 2" descr="media_1787200246731.png"/>
+          <p:cNvPicPr>
+            <a:picLocks noChangeAspect="1"/>
+          </p:cNvPicPr>
+          <p:nvPr/>
+        </p:nvPicPr>
+        <p:blipFill>
+          <a:blip r:embed="rId2"/>
+          <a:stretch>
+            <a:fillRect/>
+          </a:stretch>
+        </p:blipFill>
+        <p:spPr>
+          <a:xfrm>
+            <a:off x="731520" y="1463040"/>
+            <a:ext cx="6217920" cy="4068366"/>
+          </a:xfrm>
+          <a:prstGeom prst="rect">
+            <a:avLst/>
+          </a:prstGeom>
+        </p:spPr>
+      </p:pic>
+      <p:sp>
+        <p:nvSpPr>
+          <p:cNvPr id="4" name="Rounded Rectangle 3"/>
           <p:cNvSpPr/>
           <p:nvPr/>
         </p:nvSpPr>
         <p:spPr>
           <a:xfrm>
-            <a:off x="731520" y="1463040"/>
-            <a:ext cx="3328416" cy="4754880"/>
+            <a:off x="7223760" y="1463040"/>
+            <a:ext cx="4206240" cy="4754880"/>
           </a:xfrm>
           <a:prstGeom prst="roundRect">
             <a:avLst/>
@@ -6753,14 +7624,14 @@
       </p:sp>
       <p:sp>
         <p:nvSpPr>
-          <p:cNvPr id="4" name="TextBox 3"/>
+          <p:cNvPr id="5" name="TextBox 4"/>
           <p:cNvSpPr txBox="1"/>
           <p:nvPr/>
         </p:nvSpPr>
         <p:spPr>
           <a:xfrm>
-            <a:off x="914400" y="1645920"/>
-            <a:ext cx="2962656" cy="4389120"/>
+            <a:off x="7452360" y="1691640"/>
+            <a:ext cx="3749039" cy="4297680"/>
           </a:xfrm>
           <a:prstGeom prst="rect">
             <a:avLst/>
@@ -6777,14 +7648,26 @@
               <a:spcAft>
                 <a:spcPts val="1200"/>
               </a:spcAft>
-              <a:defRPr sz="1400" b="1">
-                <a:solidFill>
-                  <a:srgbClr val="EA4335"/>
-                </a:solidFill>
-              </a:defRPr>
-            </a:pPr>
-            <a:r>
-              <a:t>Anti-Bribery &amp; Deceptive Marketing (Sec 13.6)</a:t>
+              <a:defRPr sz="1700" b="1">
+                <a:solidFill>
+                  <a:srgbClr val="1A73E8"/>
+                </a:solidFill>
+              </a:defRPr>
+            </a:pPr>
+            <a:r>
+              <a:t>Key UI Capabilities</a:t>
+            </a:r>
+          </a:p>
+          <a:p>
+            <a:pPr>
+              <a:defRPr sz="1200" b="1">
+                <a:solidFill>
+                  <a:srgbClr val="1E293B"/>
+                </a:solidFill>
+              </a:defRPr>
+            </a:pPr>
+            <a:r>
+              <a:t>✨ 3-Column Layout</a:t>
             </a:r>
           </a:p>
           <a:p>
@@ -6792,14 +7675,34 @@
               <a:spcAft>
                 <a:spcPts val="800"/>
               </a:spcAft>
-              <a:defRPr sz="1100">
-                <a:solidFill>
-                  <a:srgbClr val="1E293B"/>
-                </a:solidFill>
-              </a:defRPr>
-            </a:pPr>
-            <a:r>
-              <a:t>• Prohibits disguising government official entertainment under 'General Marketing' to avoid scrutiny.</a:t>
+              <a:defRPr sz="1000">
+                <a:solidFill>
+                  <a:srgbClr val="64748B"/>
+                </a:solidFill>
+              </a:defRPr>
+            </a:pPr>
+            <a:r>
+              <a:t>Left: Chat Session History</a:t>
+            </a:r>
+            <a:br/>
+            <a:r>
+              <a:t>Center: Active Conversation Stream</a:t>
+            </a:r>
+            <a:br/>
+            <a:r>
+              <a:t>Right: Real-time 'My Hub' drawer</a:t>
+            </a:r>
+          </a:p>
+          <a:p>
+            <a:pPr>
+              <a:defRPr sz="1200" b="1">
+                <a:solidFill>
+                  <a:srgbClr val="1E293B"/>
+                </a:solidFill>
+              </a:defRPr>
+            </a:pPr>
+            <a:r>
+              <a:t>✨ Live 'My Hub' Sidebar</a:t>
             </a:r>
           </a:p>
           <a:p>
@@ -6807,14 +7710,26 @@
               <a:spcAft>
                 <a:spcPts val="800"/>
               </a:spcAft>
-              <a:defRPr sz="1100">
-                <a:solidFill>
-                  <a:srgbClr val="1E293B"/>
-                </a:solidFill>
-              </a:defRPr>
-            </a:pPr>
-            <a:r>
-              <a:t>• Refuses ticket creation even when user explicitly demands: 'create it anyway'.</a:t>
+              <a:defRPr sz="1000">
+                <a:solidFill>
+                  <a:srgbClr val="64748B"/>
+                </a:solidFill>
+              </a:defRPr>
+            </a:pPr>
+            <a:r>
+              <a:t>Dynamic leave balance bars and recent ITSM ticket tracker decoded live from FastMCP.</a:t>
+            </a:r>
+          </a:p>
+          <a:p>
+            <a:pPr>
+              <a:defRPr sz="1200" b="1">
+                <a:solidFill>
+                  <a:srgbClr val="1E293B"/>
+                </a:solidFill>
+              </a:defRPr>
+            </a:pPr>
+            <a:r>
+              <a:t>✨ Multi-User Persona Switcher</a:t>
             </a:r>
           </a:p>
           <a:p>
@@ -6822,97 +7737,26 @@
               <a:spcAft>
                 <a:spcPts val="800"/>
               </a:spcAft>
-              <a:defRPr sz="1100">
-                <a:solidFill>
-                  <a:srgbClr val="1E293B"/>
-                </a:solidFill>
-              </a:defRPr>
-            </a:pPr>
-            <a:r>
-              <a:t>• Mandates transparent Concur reporting + Manager Pre-Approval for client expenses &gt; $100.</a:t>
-            </a:r>
-          </a:p>
-        </p:txBody>
-      </p:sp>
-      <p:sp>
-        <p:nvSpPr>
-          <p:cNvPr id="5" name="Rounded Rectangle 4"/>
-          <p:cNvSpPr/>
-          <p:nvPr/>
-        </p:nvSpPr>
-        <p:spPr>
-          <a:xfrm>
-            <a:off x="4343400" y="1463040"/>
-            <a:ext cx="3328416" cy="4754880"/>
-          </a:xfrm>
-          <a:prstGeom prst="roundRect">
-            <a:avLst/>
-          </a:prstGeom>
-          <a:solidFill>
-            <a:srgbClr val="FFFFFF"/>
-          </a:solidFill>
-          <a:ln w="19050">
-            <a:solidFill>
-              <a:srgbClr val="E2E8F0"/>
-            </a:solidFill>
-          </a:ln>
-        </p:spPr>
-        <p:style>
-          <a:lnRef idx="1">
-            <a:schemeClr val="accent1"/>
-          </a:lnRef>
-          <a:fillRef idx="3">
-            <a:schemeClr val="accent1"/>
-          </a:fillRef>
-          <a:effectRef idx="2">
-            <a:schemeClr val="accent1"/>
-          </a:effectRef>
-          <a:fontRef idx="minor">
-            <a:schemeClr val="lt1"/>
-          </a:fontRef>
-        </p:style>
-        <p:txBody>
-          <a:bodyPr rtlCol="0" anchor="ctr"/>
-          <a:lstStyle/>
-          <a:p>
-            <a:pPr algn="ctr"/>
-          </a:p>
-        </p:txBody>
-      </p:sp>
-      <p:sp>
-        <p:nvSpPr>
-          <p:cNvPr id="6" name="TextBox 5"/>
-          <p:cNvSpPr txBox="1"/>
-          <p:nvPr/>
-        </p:nvSpPr>
-        <p:spPr>
-          <a:xfrm>
-            <a:off x="4526280" y="1645920"/>
-            <a:ext cx="2962656" cy="4389120"/>
-          </a:xfrm>
-          <a:prstGeom prst="rect">
-            <a:avLst/>
-          </a:prstGeom>
-          <a:noFill/>
-        </p:spPr>
-        <p:txBody>
-          <a:bodyPr wrap="square">
-            <a:spAutoFit/>
-          </a:bodyPr>
-          <a:lstStyle/>
-          <a:p>
-            <a:pPr>
-              <a:spcAft>
-                <a:spcPts val="1200"/>
-              </a:spcAft>
-              <a:defRPr sz="1400" b="1">
-                <a:solidFill>
-                  <a:srgbClr val="1A73E8"/>
-                </a:solidFill>
-              </a:defRPr>
-            </a:pPr>
-            <a:r>
-              <a:t>Data Loss Prevention (DLP) &amp; Privacy</a:t>
+              <a:defRPr sz="1000">
+                <a:solidFill>
+                  <a:srgbClr val="64748B"/>
+                </a:solidFill>
+              </a:defRPr>
+            </a:pPr>
+            <a:r>
+              <a:t>Seamless demonstration login across EMP-380 (Zuhaib), EMP-102 (Sarah), EMP-001 (Alex).</a:t>
+            </a:r>
+          </a:p>
+          <a:p>
+            <a:pPr>
+              <a:defRPr sz="1200" b="1">
+                <a:solidFill>
+                  <a:srgbClr val="1E293B"/>
+                </a:solidFill>
+              </a:defRPr>
+            </a:pPr>
+            <a:r>
+              <a:t>✨ Execution Trace Viewer</a:t>
             </a:r>
           </a:p>
           <a:p>
@@ -6920,14 +7764,26 @@
               <a:spcAft>
                 <a:spcPts val="800"/>
               </a:spcAft>
-              <a:defRPr sz="1100">
-                <a:solidFill>
-                  <a:srgbClr val="1E293B"/>
-                </a:solidFill>
-              </a:defRPr>
-            </a:pPr>
-            <a:r>
-              <a:t>• Singapore NRIC Masking: In-flight sanitization replaces S1234567A with [NRIC_REDACTED].</a:t>
+              <a:defRPr sz="1000">
+                <a:solidFill>
+                  <a:srgbClr val="64748B"/>
+                </a:solidFill>
+              </a:defRPr>
+            </a:pPr>
+            <a:r>
+              <a:t>Collapsible tool-call trace revealing exact JSON-RPC payloads and ADK sub-agent handoffs.</a:t>
+            </a:r>
+          </a:p>
+          <a:p>
+            <a:pPr>
+              <a:defRPr sz="1200" b="1">
+                <a:solidFill>
+                  <a:srgbClr val="1E293B"/>
+                </a:solidFill>
+              </a:defRPr>
+            </a:pPr>
+            <a:r>
+              <a:t>✨ One-Click Quick Actions</a:t>
             </a:r>
           </a:p>
           <a:p>
@@ -6935,157 +7791,14 @@
               <a:spcAft>
                 <a:spcPts val="800"/>
               </a:spcAft>
-              <a:defRPr sz="1100">
-                <a:solidFill>
-                  <a:srgbClr val="1E293B"/>
-                </a:solidFill>
-              </a:defRPr>
-            </a:pPr>
-            <a:r>
-              <a:t>• Credit Card &amp; Token Scrubbing: Strips PANs and API keys before sending to LLM context.</a:t>
-            </a:r>
-          </a:p>
-          <a:p>
-            <a:pPr>
-              <a:spcAft>
-                <a:spcPts val="800"/>
-              </a:spcAft>
-              <a:defRPr sz="1100">
-                <a:solidFill>
-                  <a:srgbClr val="1E293B"/>
-                </a:solidFill>
-              </a:defRPr>
-            </a:pPr>
-            <a:r>
-              <a:t>• GDPR / Right to be Forgotten: Session deletion endpoint for full compliance.</a:t>
-            </a:r>
-          </a:p>
-        </p:txBody>
-      </p:sp>
-      <p:sp>
-        <p:nvSpPr>
-          <p:cNvPr id="7" name="Rounded Rectangle 6"/>
-          <p:cNvSpPr/>
-          <p:nvPr/>
-        </p:nvSpPr>
-        <p:spPr>
-          <a:xfrm>
-            <a:off x="7955280" y="1463040"/>
-            <a:ext cx="3328416" cy="4754880"/>
-          </a:xfrm>
-          <a:prstGeom prst="roundRect">
-            <a:avLst/>
-          </a:prstGeom>
-          <a:solidFill>
-            <a:srgbClr val="FFFFFF"/>
-          </a:solidFill>
-          <a:ln w="19050">
-            <a:solidFill>
-              <a:srgbClr val="E2E8F0"/>
-            </a:solidFill>
-          </a:ln>
-        </p:spPr>
-        <p:style>
-          <a:lnRef idx="1">
-            <a:schemeClr val="accent1"/>
-          </a:lnRef>
-          <a:fillRef idx="3">
-            <a:schemeClr val="accent1"/>
-          </a:fillRef>
-          <a:effectRef idx="2">
-            <a:schemeClr val="accent1"/>
-          </a:effectRef>
-          <a:fontRef idx="minor">
-            <a:schemeClr val="lt1"/>
-          </a:fontRef>
-        </p:style>
-        <p:txBody>
-          <a:bodyPr rtlCol="0" anchor="ctr"/>
-          <a:lstStyle/>
-          <a:p>
-            <a:pPr algn="ctr"/>
-          </a:p>
-        </p:txBody>
-      </p:sp>
-      <p:sp>
-        <p:nvSpPr>
-          <p:cNvPr id="8" name="TextBox 7"/>
-          <p:cNvSpPr txBox="1"/>
-          <p:nvPr/>
-        </p:nvSpPr>
-        <p:spPr>
-          <a:xfrm>
-            <a:off x="8138160" y="1645920"/>
-            <a:ext cx="2962656" cy="4389120"/>
-          </a:xfrm>
-          <a:prstGeom prst="rect">
-            <a:avLst/>
-          </a:prstGeom>
-          <a:noFill/>
-        </p:spPr>
-        <p:txBody>
-          <a:bodyPr wrap="square">
-            <a:spAutoFit/>
-          </a:bodyPr>
-          <a:lstStyle/>
-          <a:p>
-            <a:pPr>
-              <a:spcAft>
-                <a:spcPts val="1200"/>
-              </a:spcAft>
-              <a:defRPr sz="1400" b="1">
-                <a:solidFill>
-                  <a:srgbClr val="FBBC05"/>
-                </a:solidFill>
-              </a:defRPr>
-            </a:pPr>
-            <a:r>
-              <a:t>Transaction &amp; Leave Notice Guardrails</a:t>
-            </a:r>
-          </a:p>
-          <a:p>
-            <a:pPr>
-              <a:spcAft>
-                <a:spcPts val="800"/>
-              </a:spcAft>
-              <a:defRPr sz="1100">
-                <a:solidFill>
-                  <a:srgbClr val="1E293B"/>
-                </a:solidFill>
-              </a:defRPr>
-            </a:pPr>
-            <a:r>
-              <a:t>• Overdraft Prevention: Blocks leave requests that exceed accrued balances.</a:t>
-            </a:r>
-          </a:p>
-          <a:p>
-            <a:pPr>
-              <a:spcAft>
-                <a:spcPts val="800"/>
-              </a:spcAft>
-              <a:defRPr sz="1100">
-                <a:solidFill>
-                  <a:srgbClr val="1E293B"/>
-                </a:solidFill>
-              </a:defRPr>
-            </a:pPr>
-            <a:r>
-              <a:t>• 15-Day Advance Notice Guard: Enforces statutory notice for long vacations while allowing routine 1-2 day short leaves.</a:t>
-            </a:r>
-          </a:p>
-          <a:p>
-            <a:pPr>
-              <a:spcAft>
-                <a:spcPts val="800"/>
-              </a:spcAft>
-              <a:defRPr sz="1100">
-                <a:solidFill>
-                  <a:srgbClr val="1E293B"/>
-                </a:solidFill>
-              </a:defRPr>
-            </a:pPr>
-            <a:r>
-              <a:t>• Medical Certificate (MC) Invariant: Enforces MC submission within 48h for leaves &gt; 2 days.</a:t>
+              <a:defRPr sz="1000">
+                <a:solidFill>
+                  <a:srgbClr val="64748B"/>
+                </a:solidFill>
+              </a:defRPr>
+            </a:pPr>
+            <a:r>
+              <a:t>Direct chip buttons for balance checks, ticket summaries, and policy FAQs.</a:t>
             </a:r>
           </a:p>
         </p:txBody>
@@ -7149,7 +7862,7 @@
               </a:defRPr>
             </a:pPr>
             <a:r>
-              <a:t>VERIFICATION &amp; TESTING</a:t>
+              <a:t>LIVE ENTERPRISE INTEGRATIONS</a:t>
             </a:r>
           </a:p>
           <a:p>
@@ -7161,31 +7874,55 @@
               </a:defRPr>
             </a:pPr>
             <a:r>
-              <a:t>Comprehensive 4-Tier Evaluation Suite (33 Test Cases)</a:t>
-            </a:r>
-          </a:p>
-        </p:txBody>
-      </p:sp>
-      <p:sp>
-        <p:nvSpPr>
-          <p:cNvPr id="3" name="Rounded Rectangle 2"/>
+              <a:t>Real-Time FastMCP SaaS Execution &amp; Attribution</a:t>
+            </a:r>
+          </a:p>
+        </p:txBody>
+      </p:sp>
+      <p:pic>
+        <p:nvPicPr>
+          <p:cNvPr id="3" name="Picture 2" descr="media_1787200239248.png"/>
+          <p:cNvPicPr>
+            <a:picLocks noChangeAspect="1"/>
+          </p:cNvPicPr>
+          <p:nvPr/>
+        </p:nvPicPr>
+        <p:blipFill>
+          <a:blip r:embed="rId2"/>
+          <a:stretch>
+            <a:fillRect/>
+          </a:stretch>
+        </p:blipFill>
+        <p:spPr>
+          <a:xfrm>
+            <a:off x="731520" y="1463040"/>
+            <a:ext cx="6583680" cy="4127659"/>
+          </a:xfrm>
+          <a:prstGeom prst="rect">
+            <a:avLst/>
+          </a:prstGeom>
+        </p:spPr>
+      </p:pic>
+      <p:sp>
+        <p:nvSpPr>
+          <p:cNvPr id="4" name="Rounded Rectangle 3"/>
           <p:cNvSpPr/>
           <p:nvPr/>
         </p:nvSpPr>
         <p:spPr>
           <a:xfrm>
-            <a:off x="731520" y="1463040"/>
-            <a:ext cx="3657600" cy="4754880"/>
+            <a:off x="7589520" y="1463040"/>
+            <a:ext cx="3840480" cy="4754880"/>
           </a:xfrm>
           <a:prstGeom prst="roundRect">
             <a:avLst/>
           </a:prstGeom>
           <a:solidFill>
-            <a:srgbClr val="E8F0FE"/>
+            <a:srgbClr val="FFFFFF"/>
           </a:solidFill>
           <a:ln w="19050">
             <a:solidFill>
-              <a:srgbClr val="1A73E8"/>
+              <a:srgbClr val="E2E8F0"/>
             </a:solidFill>
           </a:ln>
         </p:spPr>
@@ -7213,14 +7950,14 @@
       </p:sp>
       <p:sp>
         <p:nvSpPr>
-          <p:cNvPr id="4" name="TextBox 3"/>
+          <p:cNvPr id="5" name="TextBox 4"/>
           <p:cNvSpPr txBox="1"/>
           <p:nvPr/>
         </p:nvSpPr>
         <p:spPr>
           <a:xfrm>
-            <a:off x="914400" y="1691640"/>
-            <a:ext cx="3291840" cy="4297680"/>
+            <a:off x="7818120" y="1691640"/>
+            <a:ext cx="3383280" cy="4297680"/>
           </a:xfrm>
           <a:prstGeom prst="rect">
             <a:avLst/>
@@ -7234,14 +7971,29 @@
           <a:lstStyle/>
           <a:p>
             <a:pPr>
-              <a:defRPr sz="1500" b="1">
-                <a:solidFill>
-                  <a:srgbClr val="1A73E8"/>
-                </a:solidFill>
-              </a:defRPr>
-            </a:pPr>
-            <a:r>
-              <a:t>Overall Readiness</a:t>
+              <a:spcAft>
+                <a:spcPts val="1200"/>
+              </a:spcAft>
+              <a:defRPr sz="1600" b="1">
+                <a:solidFill>
+                  <a:srgbClr val="34A853"/>
+                </a:solidFill>
+              </a:defRPr>
+            </a:pPr>
+            <a:r>
+              <a:t>Verified SaaS Workflows</a:t>
+            </a:r>
+          </a:p>
+          <a:p>
+            <a:pPr>
+              <a:defRPr sz="1150" b="1">
+                <a:solidFill>
+                  <a:srgbClr val="1E293B"/>
+                </a:solidFill>
+              </a:defRPr>
+            </a:pPr>
+            <a:r>
+              <a:t>🔗 Direct Portal Creation</a:t>
             </a:r>
           </a:p>
           <a:p>
@@ -7249,172 +8001,14 @@
               <a:spcAft>
                 <a:spcPts val="800"/>
               </a:spcAft>
-              <a:defRPr sz="3600" b="1">
-                <a:solidFill>
-                  <a:srgbClr val="34A853"/>
-                </a:solidFill>
-              </a:defRPr>
-            </a:pPr>
-            <a:r>
-              <a:t>99.34%</a:t>
-            </a:r>
-          </a:p>
-          <a:p>
-            <a:pPr>
-              <a:spcAft>
-                <a:spcPts val="1400"/>
-              </a:spcAft>
-              <a:defRPr sz="1200" b="1">
-                <a:solidFill>
-                  <a:srgbClr val="1E293B"/>
-                </a:solidFill>
-              </a:defRPr>
-            </a:pPr>
-            <a:r>
-              <a:t>✅ 33 / 33 Passed (100.0% Pass Rate)</a:t>
-            </a:r>
-          </a:p>
-          <a:p>
-            <a:pPr>
-              <a:spcAft>
-                <a:spcPts val="400"/>
-              </a:spcAft>
-              <a:defRPr sz="1100">
-                <a:solidFill>
-                  <a:srgbClr val="1E293B"/>
-                </a:solidFill>
-              </a:defRPr>
-            </a:pPr>
-            <a:r>
-              <a:t>• Relevance (S_rel, 30%): 99.8%</a:t>
-            </a:r>
-          </a:p>
-          <a:p>
-            <a:pPr>
-              <a:spcAft>
-                <a:spcPts val="400"/>
-              </a:spcAft>
-              <a:defRPr sz="1100">
-                <a:solidFill>
-                  <a:srgbClr val="1E293B"/>
-                </a:solidFill>
-              </a:defRPr>
-            </a:pPr>
-            <a:r>
-              <a:t>• Rigor &amp; Reasoning (S_rigor, 35%): 100.0%</a:t>
-            </a:r>
-          </a:p>
-          <a:p>
-            <a:pPr>
-              <a:spcAft>
-                <a:spcPts val="400"/>
-              </a:spcAft>
-              <a:defRPr sz="1100">
-                <a:solidFill>
-                  <a:srgbClr val="1E293B"/>
-                </a:solidFill>
-              </a:defRPr>
-            </a:pPr>
-            <a:r>
-              <a:t>• Cost &amp; Time (S_cost_time, 15%): 96.0%</a:t>
-            </a:r>
-          </a:p>
-          <a:p>
-            <a:pPr>
-              <a:spcAft>
-                <a:spcPts val="400"/>
-              </a:spcAft>
-              <a:defRPr sz="1100">
-                <a:solidFill>
-                  <a:srgbClr val="1E293B"/>
-                </a:solidFill>
-              </a:defRPr>
-            </a:pPr>
-            <a:r>
-              <a:t>• Safety Guardrails (S_guard, 20%): 100.0%</a:t>
-            </a:r>
-          </a:p>
-        </p:txBody>
-      </p:sp>
-      <p:sp>
-        <p:nvSpPr>
-          <p:cNvPr id="5" name="Rounded Rectangle 4"/>
-          <p:cNvSpPr/>
-          <p:nvPr/>
-        </p:nvSpPr>
-        <p:spPr>
-          <a:xfrm>
-            <a:off x="4663440" y="1463040"/>
-            <a:ext cx="6766560" cy="4754880"/>
-          </a:xfrm>
-          <a:prstGeom prst="roundRect">
-            <a:avLst/>
-          </a:prstGeom>
-          <a:solidFill>
-            <a:srgbClr val="FFFFFF"/>
-          </a:solidFill>
-          <a:ln w="19050">
-            <a:solidFill>
-              <a:srgbClr val="E2E8F0"/>
-            </a:solidFill>
-          </a:ln>
-        </p:spPr>
-        <p:style>
-          <a:lnRef idx="1">
-            <a:schemeClr val="accent1"/>
-          </a:lnRef>
-          <a:fillRef idx="3">
-            <a:schemeClr val="accent1"/>
-          </a:fillRef>
-          <a:effectRef idx="2">
-            <a:schemeClr val="accent1"/>
-          </a:effectRef>
-          <a:fontRef idx="minor">
-            <a:schemeClr val="lt1"/>
-          </a:fontRef>
-        </p:style>
-        <p:txBody>
-          <a:bodyPr rtlCol="0" anchor="ctr"/>
-          <a:lstStyle/>
-          <a:p>
-            <a:pPr algn="ctr"/>
-          </a:p>
-        </p:txBody>
-      </p:sp>
-      <p:sp>
-        <p:nvSpPr>
-          <p:cNvPr id="6" name="TextBox 5"/>
-          <p:cNvSpPr txBox="1"/>
-          <p:nvPr/>
-        </p:nvSpPr>
-        <p:spPr>
-          <a:xfrm>
-            <a:off x="4892040" y="1691640"/>
-            <a:ext cx="6309360" cy="4297680"/>
-          </a:xfrm>
-          <a:prstGeom prst="rect">
-            <a:avLst/>
-          </a:prstGeom>
-          <a:noFill/>
-        </p:spPr>
-        <p:txBody>
-          <a:bodyPr wrap="square">
-            <a:spAutoFit/>
-          </a:bodyPr>
-          <a:lstStyle/>
-          <a:p>
-            <a:pPr>
-              <a:spcAft>
-                <a:spcPts val="1000"/>
-              </a:spcAft>
-              <a:defRPr sz="1600" b="1">
-                <a:solidFill>
-                  <a:srgbClr val="1A73E8"/>
-                </a:solidFill>
-              </a:defRPr>
-            </a:pPr>
-            <a:r>
-              <a:t>Stratified Dataset Coverage</a:t>
+              <a:defRPr sz="950">
+                <a:solidFill>
+                  <a:srgbClr val="64748B"/>
+                </a:solidFill>
+              </a:defRPr>
+            </a:pPr>
+            <a:r>
+              <a:t>Tickets (INC0002836, INC0002835, etc.) appear instantly on the live SaaS portal with zero human middleware.</a:t>
             </a:r>
           </a:p>
           <a:p>
@@ -7426,13 +8020,13 @@
               </a:defRPr>
             </a:pPr>
             <a:r>
-              <a:t>🟢 Tier 1: Happy Path (10 Cases)</a:t>
-            </a:r>
-          </a:p>
-          <a:p>
-            <a:pPr>
-              <a:spcAft>
-                <a:spcPts val="400"/>
+              <a:t>🔗 Accurate Attribution</a:t>
+            </a:r>
+          </a:p>
+          <a:p>
+            <a:pPr>
+              <a:spcAft>
+                <a:spcPts val="800"/>
               </a:spcAft>
               <a:defRPr sz="950">
                 <a:solidFill>
@@ -7441,7 +8035,7 @@
               </a:defRPr>
             </a:pPr>
             <a:r>
-              <a:t>MOM statutory sick/maternity leaves, vacation accrual calculations, WorkWeek balance lookups, and ServiceImmediately ticket submissions.</a:t>
+              <a:t>Initial dispatch comments automatically link the employee's ID (e.g. 'Updated by: 380') in the audit trail.</a:t>
             </a:r>
           </a:p>
           <a:p>
@@ -7453,13 +8047,13 @@
               </a:defRPr>
             </a:pPr>
             <a:r>
-              <a:t>🟡 Tier 2: MAS Gotchas &amp; Multi-Hop (6 Cases)</a:t>
-            </a:r>
-          </a:p>
-          <a:p>
-            <a:pPr>
-              <a:spcAft>
-                <a:spcPts val="400"/>
+              <a:t>🔗 Real-Time Balances</a:t>
+            </a:r>
+          </a:p>
+          <a:p>
+            <a:pPr>
+              <a:spcAft>
+                <a:spcPts val="800"/>
               </a:spcAft>
               <a:defRPr sz="950">
                 <a:solidFill>
@@ -7468,7 +8062,7 @@
               </a:defRPr>
             </a:pPr>
             <a:r>
-              <a:t>Cross-specialist handoffs, exhaustion preconditions, prohibited venue overrides, and ticket priority anti-inflation.</a:t>
+              <a:t>Leave deductions in WorkWeek immediately update accrued vacation/sick balances in the UI drawer.</a:t>
             </a:r>
           </a:p>
           <a:p>
@@ -7480,13 +8074,13 @@
               </a:defRPr>
             </a:pPr>
             <a:r>
-              <a:t>🔴 Tier 3: Hallucination Baits (3 Cases)</a:t>
-            </a:r>
-          </a:p>
-          <a:p>
-            <a:pPr>
-              <a:spcAft>
-                <a:spcPts val="400"/>
+              <a:t>🔗 Resilient Fallback</a:t>
+            </a:r>
+          </a:p>
+          <a:p>
+            <a:pPr>
+              <a:spcAft>
+                <a:spcPts val="800"/>
               </a:spcAft>
               <a:defRPr sz="950">
                 <a:solidFill>
@@ -7495,88 +8089,7 @@
               </a:defRPr>
             </a:pPr>
             <a:r>
-              <a:t>Fictitious perks (pet helicopter transfers, crypto dining stipends, corporate yacht charters) testing strict zero-hallucination abstention.</a:t>
-            </a:r>
-          </a:p>
-          <a:p>
-            <a:pPr>
-              <a:defRPr sz="1150" b="1">
-                <a:solidFill>
-                  <a:srgbClr val="1E293B"/>
-                </a:solidFill>
-              </a:defRPr>
-            </a:pPr>
-            <a:r>
-              <a:t>🟣 Tier 4: Boundary &amp; Safety Probes (3 Cases)</a:t>
-            </a:r>
-          </a:p>
-          <a:p>
-            <a:pPr>
-              <a:spcAft>
-                <a:spcPts val="400"/>
-              </a:spcAft>
-              <a:defRPr sz="950">
-                <a:solidFill>
-                  <a:srgbClr val="64748B"/>
-                </a:solidFill>
-              </a:defRPr>
-            </a:pPr>
-            <a:r>
-              <a:t>Out-of-scope domain probes (code algorithms, political opinions, stock trading advice) verifying polite refusals.</a:t>
-            </a:r>
-          </a:p>
-          <a:p>
-            <a:pPr>
-              <a:defRPr sz="1150" b="1">
-                <a:solidFill>
-                  <a:srgbClr val="1E293B"/>
-                </a:solidFill>
-              </a:defRPr>
-            </a:pPr>
-            <a:r>
-              <a:t>💬 Multi-Turn Trajectories (3 Flows)</a:t>
-            </a:r>
-          </a:p>
-          <a:p>
-            <a:pPr>
-              <a:spcAft>
-                <a:spcPts val="400"/>
-              </a:spcAft>
-              <a:defRPr sz="950">
-                <a:solidFill>
-                  <a:srgbClr val="64748B"/>
-                </a:solidFill>
-              </a:defRPr>
-            </a:pPr>
-            <a:r>
-              <a:t>Complex stateful conversational flows with clarification loops and iterative issue troubleshooting.</a:t>
-            </a:r>
-          </a:p>
-          <a:p>
-            <a:pPr>
-              <a:defRPr sz="1150" b="1">
-                <a:solidFill>
-                  <a:srgbClr val="1E293B"/>
-                </a:solidFill>
-              </a:defRPr>
-            </a:pPr>
-            <a:r>
-              <a:t>🛡️ Adversarial &amp; Guardrails (8 Cases)</a:t>
-            </a:r>
-          </a:p>
-          <a:p>
-            <a:pPr>
-              <a:spcAft>
-                <a:spcPts val="400"/>
-              </a:spcAft>
-              <a:defRPr sz="950">
-                <a:solidFill>
-                  <a:srgbClr val="64748B"/>
-                </a:solidFill>
-              </a:defRPr>
-            </a:pPr>
-            <a:r>
-              <a:t>Singapore NRIC masking, credit card DLP, prompt injection jailbreak defenses, and SaaS 500 error escalation.</a:t>
+              <a:t>High-fidelity mock execution gracefully protects user experience during sandbox credential rotations.</a:t>
             </a:r>
           </a:p>
         </p:txBody>
